--- a/2025/LEC/02-2 Разложение и наивное предсказание.pptx
+++ b/2025/LEC/02-2 Разложение и наивное предсказание.pptx
@@ -252,7 +252,7 @@
           <a:p>
             <a:fld id="{C730246F-5962-E14A-AAF2-985CCFDAC345}" type="datetimeFigureOut">
               <a:rPr lang="ru-RU" smtClean="0"/>
-              <a:t>15.07.2025</a:t>
+              <a:t>23.07.2025</a:t>
             </a:fld>
             <a:endParaRPr lang="ru-RU"/>
           </a:p>
@@ -1200,7 +1200,7 @@
           <a:p>
             <a:fld id="{44343DC6-30E4-4569-999A-C703F926F2AF}" type="datetimeFigureOut">
               <a:rPr lang="en-US" smtClean="0"/>
-              <a:t>7/15/2025</a:t>
+              <a:t>7/23/2025</a:t>
             </a:fld>
             <a:endParaRPr lang="en-US"/>
           </a:p>
@@ -1400,7 +1400,7 @@
           <a:p>
             <a:fld id="{44343DC6-30E4-4569-999A-C703F926F2AF}" type="datetimeFigureOut">
               <a:rPr lang="en-US" smtClean="0"/>
-              <a:t>7/15/2025</a:t>
+              <a:t>7/23/2025</a:t>
             </a:fld>
             <a:endParaRPr lang="en-US"/>
           </a:p>
@@ -1610,7 +1610,7 @@
           <a:p>
             <a:fld id="{44343DC6-30E4-4569-999A-C703F926F2AF}" type="datetimeFigureOut">
               <a:rPr lang="en-US" smtClean="0"/>
-              <a:t>7/15/2025</a:t>
+              <a:t>7/23/2025</a:t>
             </a:fld>
             <a:endParaRPr lang="en-US"/>
           </a:p>
@@ -1810,7 +1810,7 @@
           <a:p>
             <a:fld id="{44343DC6-30E4-4569-999A-C703F926F2AF}" type="datetimeFigureOut">
               <a:rPr lang="en-US" smtClean="0"/>
-              <a:t>7/15/2025</a:t>
+              <a:t>7/23/2025</a:t>
             </a:fld>
             <a:endParaRPr lang="en-US"/>
           </a:p>
@@ -2086,7 +2086,7 @@
           <a:p>
             <a:fld id="{44343DC6-30E4-4569-999A-C703F926F2AF}" type="datetimeFigureOut">
               <a:rPr lang="en-US" smtClean="0"/>
-              <a:t>7/15/2025</a:t>
+              <a:t>7/23/2025</a:t>
             </a:fld>
             <a:endParaRPr lang="en-US"/>
           </a:p>
@@ -2354,7 +2354,7 @@
           <a:p>
             <a:fld id="{44343DC6-30E4-4569-999A-C703F926F2AF}" type="datetimeFigureOut">
               <a:rPr lang="en-US" smtClean="0"/>
-              <a:t>7/15/2025</a:t>
+              <a:t>7/23/2025</a:t>
             </a:fld>
             <a:endParaRPr lang="en-US"/>
           </a:p>
@@ -2769,7 +2769,7 @@
           <a:p>
             <a:fld id="{44343DC6-30E4-4569-999A-C703F926F2AF}" type="datetimeFigureOut">
               <a:rPr lang="en-US" smtClean="0"/>
-              <a:t>7/15/2025</a:t>
+              <a:t>7/23/2025</a:t>
             </a:fld>
             <a:endParaRPr lang="en-US"/>
           </a:p>
@@ -2911,7 +2911,7 @@
           <a:p>
             <a:fld id="{44343DC6-30E4-4569-999A-C703F926F2AF}" type="datetimeFigureOut">
               <a:rPr lang="en-US" smtClean="0"/>
-              <a:t>7/15/2025</a:t>
+              <a:t>7/23/2025</a:t>
             </a:fld>
             <a:endParaRPr lang="en-US"/>
           </a:p>
@@ -3024,7 +3024,7 @@
           <a:p>
             <a:fld id="{44343DC6-30E4-4569-999A-C703F926F2AF}" type="datetimeFigureOut">
               <a:rPr lang="en-US" smtClean="0"/>
-              <a:t>7/15/2025</a:t>
+              <a:t>7/23/2025</a:t>
             </a:fld>
             <a:endParaRPr lang="en-US"/>
           </a:p>
@@ -3337,7 +3337,7 @@
           <a:p>
             <a:fld id="{44343DC6-30E4-4569-999A-C703F926F2AF}" type="datetimeFigureOut">
               <a:rPr lang="en-US" smtClean="0"/>
-              <a:t>7/15/2025</a:t>
+              <a:t>7/23/2025</a:t>
             </a:fld>
             <a:endParaRPr lang="en-US"/>
           </a:p>
@@ -3626,7 +3626,7 @@
           <a:p>
             <a:fld id="{44343DC6-30E4-4569-999A-C703F926F2AF}" type="datetimeFigureOut">
               <a:rPr lang="en-US" smtClean="0"/>
-              <a:t>7/15/2025</a:t>
+              <a:t>7/23/2025</a:t>
             </a:fld>
             <a:endParaRPr lang="en-US"/>
           </a:p>
@@ -3869,7 +3869,7 @@
           <a:p>
             <a:fld id="{44343DC6-30E4-4569-999A-C703F926F2AF}" type="datetimeFigureOut">
               <a:rPr lang="en-US" smtClean="0"/>
-              <a:t>7/15/2025</a:t>
+              <a:t>7/23/2025</a:t>
             </a:fld>
             <a:endParaRPr lang="en-US"/>
           </a:p>
@@ -14622,7 +14622,7 @@
 </file>
 
 <file path=ppt/slides/slide2.xml><?xml version="1.0" encoding="utf-8"?>
-<p:sld xmlns:a="http://schemas.openxmlformats.org/drawingml/2006/main" xmlns:r="http://schemas.openxmlformats.org/officeDocument/2006/relationships" xmlns:p="http://schemas.openxmlformats.org/presentationml/2006/main">
+<p:sld xmlns:a="http://schemas.openxmlformats.org/drawingml/2006/main" xmlns:r="http://schemas.openxmlformats.org/officeDocument/2006/relationships" xmlns:p="http://schemas.openxmlformats.org/presentationml/2006/main" show="0">
   <p:cSld>
     <p:spTree>
       <p:nvGrpSpPr>
@@ -14660,8 +14660,13 @@
           <a:p>
             <a:r>
               <a:rPr lang="ru-RU" dirty="0"/>
-              <a:t>Методы предсказания в курсе</a:t>
-            </a:r>
+              <a:t>Методы предсказания </a:t>
+            </a:r>
+            <a:r>
+              <a:rPr lang="ru-RU" dirty="0" smtClean="0"/>
+              <a:t>ВР</a:t>
+            </a:r>
+            <a:endParaRPr lang="ru-RU" dirty="0"/>
           </a:p>
         </p:txBody>
       </p:sp>
@@ -14763,7 +14768,7 @@
         </p:nvSpPr>
         <p:spPr>
           <a:xfrm>
-            <a:off x="2446695" y="4070731"/>
+            <a:off x="2007646" y="6075144"/>
             <a:ext cx="6096000" cy="646331"/>
           </a:xfrm>
           <a:prstGeom prst="rect">
@@ -14937,6 +14942,14 @@
   <p:clrMapOvr>
     <a:masterClrMapping/>
   </p:clrMapOvr>
+  <mc:AlternateContent xmlns:mc="http://schemas.openxmlformats.org/markup-compatibility/2006">
+    <mc:Choice xmlns:p14="http://schemas.microsoft.com/office/powerpoint/2010/main" Requires="p14">
+      <p:transition spd="slow" p14:dur="2000"/>
+    </mc:Choice>
+    <mc:Fallback>
+      <p:transition spd="slow"/>
+    </mc:Fallback>
+  </mc:AlternateContent>
 </p:sld>
 </file>
 

--- a/2025/LEC/02-2 Разложение и наивное предсказание.pptx
+++ b/2025/LEC/02-2 Разложение и наивное предсказание.pptx
@@ -252,7 +252,7 @@
           <a:p>
             <a:fld id="{C730246F-5962-E14A-AAF2-985CCFDAC345}" type="datetimeFigureOut">
               <a:rPr lang="ru-RU" smtClean="0"/>
-              <a:t>23.07.2025</a:t>
+              <a:t>08.08.2025</a:t>
             </a:fld>
             <a:endParaRPr lang="ru-RU"/>
           </a:p>
@@ -1200,7 +1200,7 @@
           <a:p>
             <a:fld id="{44343DC6-30E4-4569-999A-C703F926F2AF}" type="datetimeFigureOut">
               <a:rPr lang="en-US" smtClean="0"/>
-              <a:t>7/23/2025</a:t>
+              <a:t>8/8/25</a:t>
             </a:fld>
             <a:endParaRPr lang="en-US"/>
           </a:p>
@@ -1400,7 +1400,7 @@
           <a:p>
             <a:fld id="{44343DC6-30E4-4569-999A-C703F926F2AF}" type="datetimeFigureOut">
               <a:rPr lang="en-US" smtClean="0"/>
-              <a:t>7/23/2025</a:t>
+              <a:t>8/8/25</a:t>
             </a:fld>
             <a:endParaRPr lang="en-US"/>
           </a:p>
@@ -1610,7 +1610,7 @@
           <a:p>
             <a:fld id="{44343DC6-30E4-4569-999A-C703F926F2AF}" type="datetimeFigureOut">
               <a:rPr lang="en-US" smtClean="0"/>
-              <a:t>7/23/2025</a:t>
+              <a:t>8/8/25</a:t>
             </a:fld>
             <a:endParaRPr lang="en-US"/>
           </a:p>
@@ -1810,7 +1810,7 @@
           <a:p>
             <a:fld id="{44343DC6-30E4-4569-999A-C703F926F2AF}" type="datetimeFigureOut">
               <a:rPr lang="en-US" smtClean="0"/>
-              <a:t>7/23/2025</a:t>
+              <a:t>8/8/25</a:t>
             </a:fld>
             <a:endParaRPr lang="en-US"/>
           </a:p>
@@ -2086,7 +2086,7 @@
           <a:p>
             <a:fld id="{44343DC6-30E4-4569-999A-C703F926F2AF}" type="datetimeFigureOut">
               <a:rPr lang="en-US" smtClean="0"/>
-              <a:t>7/23/2025</a:t>
+              <a:t>8/8/25</a:t>
             </a:fld>
             <a:endParaRPr lang="en-US"/>
           </a:p>
@@ -2354,7 +2354,7 @@
           <a:p>
             <a:fld id="{44343DC6-30E4-4569-999A-C703F926F2AF}" type="datetimeFigureOut">
               <a:rPr lang="en-US" smtClean="0"/>
-              <a:t>7/23/2025</a:t>
+              <a:t>8/8/25</a:t>
             </a:fld>
             <a:endParaRPr lang="en-US"/>
           </a:p>
@@ -2769,7 +2769,7 @@
           <a:p>
             <a:fld id="{44343DC6-30E4-4569-999A-C703F926F2AF}" type="datetimeFigureOut">
               <a:rPr lang="en-US" smtClean="0"/>
-              <a:t>7/23/2025</a:t>
+              <a:t>8/8/25</a:t>
             </a:fld>
             <a:endParaRPr lang="en-US"/>
           </a:p>
@@ -2911,7 +2911,7 @@
           <a:p>
             <a:fld id="{44343DC6-30E4-4569-999A-C703F926F2AF}" type="datetimeFigureOut">
               <a:rPr lang="en-US" smtClean="0"/>
-              <a:t>7/23/2025</a:t>
+              <a:t>8/8/25</a:t>
             </a:fld>
             <a:endParaRPr lang="en-US"/>
           </a:p>
@@ -3024,7 +3024,7 @@
           <a:p>
             <a:fld id="{44343DC6-30E4-4569-999A-C703F926F2AF}" type="datetimeFigureOut">
               <a:rPr lang="en-US" smtClean="0"/>
-              <a:t>7/23/2025</a:t>
+              <a:t>8/8/25</a:t>
             </a:fld>
             <a:endParaRPr lang="en-US"/>
           </a:p>
@@ -3337,7 +3337,7 @@
           <a:p>
             <a:fld id="{44343DC6-30E4-4569-999A-C703F926F2AF}" type="datetimeFigureOut">
               <a:rPr lang="en-US" smtClean="0"/>
-              <a:t>7/23/2025</a:t>
+              <a:t>8/8/25</a:t>
             </a:fld>
             <a:endParaRPr lang="en-US"/>
           </a:p>
@@ -3626,7 +3626,7 @@
           <a:p>
             <a:fld id="{44343DC6-30E4-4569-999A-C703F926F2AF}" type="datetimeFigureOut">
               <a:rPr lang="en-US" smtClean="0"/>
-              <a:t>7/23/2025</a:t>
+              <a:t>8/8/25</a:t>
             </a:fld>
             <a:endParaRPr lang="en-US"/>
           </a:p>
@@ -3869,7 +3869,7 @@
           <a:p>
             <a:fld id="{44343DC6-30E4-4569-999A-C703F926F2AF}" type="datetimeFigureOut">
               <a:rPr lang="en-US" smtClean="0"/>
-              <a:t>7/23/2025</a:t>
+              <a:t>8/8/25</a:t>
             </a:fld>
             <a:endParaRPr lang="en-US"/>
           </a:p>
@@ -7449,12 +7449,6 @@
                         </a:rPr>
                         <a:t>Одна или </a:t>
                       </a:r>
-                      <a:r>
-                        <a:rPr lang="en-US" sz="1600" u="none" strike="noStrike" dirty="0">
-                          <a:effectLst/>
-                        </a:rPr>
-                        <a:t/>
-                      </a:r>
                       <a:br>
                         <a:rPr lang="en-US" sz="1600" u="none" strike="noStrike" dirty="0">
                           <a:effectLst/>
@@ -8547,12 +8541,6 @@
                           <a:effectLst/>
                         </a:rPr>
                         <a:t>+</a:t>
-                      </a:r>
-                      <a:r>
-                        <a:rPr lang="ru-RU" sz="1800" u="none" strike="noStrike" dirty="0">
-                          <a:effectLst/>
-                        </a:rPr>
-                        <a:t/>
                       </a:r>
                       <a:br>
                         <a:rPr lang="ru-RU" sz="1800" u="none" strike="noStrike" dirty="0">
@@ -10092,12 +10080,6 @@
                     <a:cs typeface="Times New Roman" panose="02020603050405020304" pitchFamily="18" charset="0"/>
                   </a:rPr>
                   <a:t> – это остаточная часть (шумы), </a:t>
-                </a:r>
-                <a:r>
-                  <a:rPr lang="en-US" altLang="ru-RU" sz="1800" dirty="0">
-                    <a:cs typeface="Times New Roman" panose="02020603050405020304" pitchFamily="18" charset="0"/>
-                  </a:rPr>
-                  <a:t/>
                 </a:r>
                 <a:br>
                   <a:rPr lang="en-US" altLang="ru-RU" sz="1800" dirty="0">
@@ -12247,12 +12229,6 @@
                   </a:rPr>
                   <a:t>,</a:t>
                 </a:r>
-                <a:r>
-                  <a:rPr lang="ru-RU" altLang="ru-RU" sz="2000" i="1" dirty="0">
-                    <a:cs typeface="Times New Roman" panose="02020603050405020304" pitchFamily="18" charset="0"/>
-                  </a:rPr>
-                  <a:t/>
-                </a:r>
                 <a:br>
                   <a:rPr lang="ru-RU" altLang="ru-RU" sz="2000" i="1" dirty="0">
                     <a:cs typeface="Times New Roman" panose="02020603050405020304" pitchFamily="18" charset="0"/>
@@ -14660,13 +14636,8 @@
           <a:p>
             <a:r>
               <a:rPr lang="ru-RU" dirty="0"/>
-              <a:t>Методы предсказания </a:t>
-            </a:r>
-            <a:r>
-              <a:rPr lang="ru-RU" dirty="0" smtClean="0"/>
-              <a:t>ВР</a:t>
-            </a:r>
-            <a:endParaRPr lang="ru-RU" dirty="0"/>
+              <a:t>Методы предсказания ВР</a:t>
+            </a:r>
           </a:p>
         </p:txBody>
       </p:sp>
@@ -14942,14 +14913,6 @@
   <p:clrMapOvr>
     <a:masterClrMapping/>
   </p:clrMapOvr>
-  <mc:AlternateContent xmlns:mc="http://schemas.openxmlformats.org/markup-compatibility/2006">
-    <mc:Choice xmlns:p14="http://schemas.microsoft.com/office/powerpoint/2010/main" Requires="p14">
-      <p:transition spd="slow" p14:dur="2000"/>
-    </mc:Choice>
-    <mc:Fallback>
-      <p:transition spd="slow"/>
-    </mc:Fallback>
-  </mc:AlternateContent>
 </p:sld>
 </file>
 

--- a/2025/LEC/02-2 Разложение и наивное предсказание.pptx
+++ b/2025/LEC/02-2 Разложение и наивное предсказание.pptx
@@ -252,7 +252,7 @@
           <a:p>
             <a:fld id="{C730246F-5962-E14A-AAF2-985CCFDAC345}" type="datetimeFigureOut">
               <a:rPr lang="ru-RU" smtClean="0"/>
-              <a:t>08.08.2025</a:t>
+              <a:t>10.08.2025</a:t>
             </a:fld>
             <a:endParaRPr lang="ru-RU"/>
           </a:p>
@@ -1200,7 +1200,7 @@
           <a:p>
             <a:fld id="{44343DC6-30E4-4569-999A-C703F926F2AF}" type="datetimeFigureOut">
               <a:rPr lang="en-US" smtClean="0"/>
-              <a:t>8/8/25</a:t>
+              <a:t>8/10/25</a:t>
             </a:fld>
             <a:endParaRPr lang="en-US"/>
           </a:p>
@@ -1400,7 +1400,7 @@
           <a:p>
             <a:fld id="{44343DC6-30E4-4569-999A-C703F926F2AF}" type="datetimeFigureOut">
               <a:rPr lang="en-US" smtClean="0"/>
-              <a:t>8/8/25</a:t>
+              <a:t>8/10/25</a:t>
             </a:fld>
             <a:endParaRPr lang="en-US"/>
           </a:p>
@@ -1610,7 +1610,7 @@
           <a:p>
             <a:fld id="{44343DC6-30E4-4569-999A-C703F926F2AF}" type="datetimeFigureOut">
               <a:rPr lang="en-US" smtClean="0"/>
-              <a:t>8/8/25</a:t>
+              <a:t>8/10/25</a:t>
             </a:fld>
             <a:endParaRPr lang="en-US"/>
           </a:p>
@@ -1810,7 +1810,7 @@
           <a:p>
             <a:fld id="{44343DC6-30E4-4569-999A-C703F926F2AF}" type="datetimeFigureOut">
               <a:rPr lang="en-US" smtClean="0"/>
-              <a:t>8/8/25</a:t>
+              <a:t>8/10/25</a:t>
             </a:fld>
             <a:endParaRPr lang="en-US"/>
           </a:p>
@@ -2086,7 +2086,7 @@
           <a:p>
             <a:fld id="{44343DC6-30E4-4569-999A-C703F926F2AF}" type="datetimeFigureOut">
               <a:rPr lang="en-US" smtClean="0"/>
-              <a:t>8/8/25</a:t>
+              <a:t>8/10/25</a:t>
             </a:fld>
             <a:endParaRPr lang="en-US"/>
           </a:p>
@@ -2354,7 +2354,7 @@
           <a:p>
             <a:fld id="{44343DC6-30E4-4569-999A-C703F926F2AF}" type="datetimeFigureOut">
               <a:rPr lang="en-US" smtClean="0"/>
-              <a:t>8/8/25</a:t>
+              <a:t>8/10/25</a:t>
             </a:fld>
             <a:endParaRPr lang="en-US"/>
           </a:p>
@@ -2769,7 +2769,7 @@
           <a:p>
             <a:fld id="{44343DC6-30E4-4569-999A-C703F926F2AF}" type="datetimeFigureOut">
               <a:rPr lang="en-US" smtClean="0"/>
-              <a:t>8/8/25</a:t>
+              <a:t>8/10/25</a:t>
             </a:fld>
             <a:endParaRPr lang="en-US"/>
           </a:p>
@@ -2911,7 +2911,7 @@
           <a:p>
             <a:fld id="{44343DC6-30E4-4569-999A-C703F926F2AF}" type="datetimeFigureOut">
               <a:rPr lang="en-US" smtClean="0"/>
-              <a:t>8/8/25</a:t>
+              <a:t>8/10/25</a:t>
             </a:fld>
             <a:endParaRPr lang="en-US"/>
           </a:p>
@@ -3024,7 +3024,7 @@
           <a:p>
             <a:fld id="{44343DC6-30E4-4569-999A-C703F926F2AF}" type="datetimeFigureOut">
               <a:rPr lang="en-US" smtClean="0"/>
-              <a:t>8/8/25</a:t>
+              <a:t>8/10/25</a:t>
             </a:fld>
             <a:endParaRPr lang="en-US"/>
           </a:p>
@@ -3337,7 +3337,7 @@
           <a:p>
             <a:fld id="{44343DC6-30E4-4569-999A-C703F926F2AF}" type="datetimeFigureOut">
               <a:rPr lang="en-US" smtClean="0"/>
-              <a:t>8/8/25</a:t>
+              <a:t>8/10/25</a:t>
             </a:fld>
             <a:endParaRPr lang="en-US"/>
           </a:p>
@@ -3626,7 +3626,7 @@
           <a:p>
             <a:fld id="{44343DC6-30E4-4569-999A-C703F926F2AF}" type="datetimeFigureOut">
               <a:rPr lang="en-US" smtClean="0"/>
-              <a:t>8/8/25</a:t>
+              <a:t>8/10/25</a:t>
             </a:fld>
             <a:endParaRPr lang="en-US"/>
           </a:p>
@@ -3869,7 +3869,7 @@
           <a:p>
             <a:fld id="{44343DC6-30E4-4569-999A-C703F926F2AF}" type="datetimeFigureOut">
               <a:rPr lang="en-US" smtClean="0"/>
-              <a:t>8/8/25</a:t>
+              <a:t>8/10/25</a:t>
             </a:fld>
             <a:endParaRPr lang="en-US"/>
           </a:p>
@@ -14951,7 +14951,7 @@
         </p:nvSpPr>
         <p:spPr>
           <a:xfrm>
-            <a:off x="196770" y="365126"/>
+            <a:off x="941408" y="127639"/>
             <a:ext cx="11157030" cy="491402"/>
           </a:xfrm>
         </p:spPr>
@@ -14986,197 +14986,196 @@
         </p:nvSpPr>
         <p:spPr>
           <a:xfrm>
-            <a:off x="196771" y="949124"/>
-            <a:ext cx="11620982" cy="5227839"/>
+            <a:off x="196770" y="619041"/>
+            <a:ext cx="11620982" cy="5677794"/>
           </a:xfrm>
         </p:spPr>
         <p:txBody>
           <a:bodyPr>
-            <a:normAutofit/>
+            <a:normAutofit lnSpcReduction="10000"/>
           </a:bodyPr>
           <a:lstStyle/>
           <a:p>
             <a:r>
-              <a:rPr lang="ru-RU" sz="2200" dirty="0"/>
+              <a:rPr lang="ru-RU" sz="2300" dirty="0"/>
               <a:t>Сезонность не всегда очевидна, </a:t>
             </a:r>
           </a:p>
           <a:p>
             <a:pPr lvl="1"/>
             <a:r>
-              <a:rPr lang="ru-RU" sz="2200" dirty="0"/>
+              <a:rPr lang="ru-RU" sz="2300" dirty="0"/>
               <a:t>компоненты сезонности могут быть визуально скрыты другими компонентами</a:t>
             </a:r>
           </a:p>
           <a:p>
             <a:pPr lvl="1"/>
             <a:r>
-              <a:rPr lang="ru-RU" sz="2200" dirty="0"/>
+              <a:rPr lang="ru-RU" sz="2300" dirty="0"/>
               <a:t>Сезонность важно не спутать с цикличностью особенно для коротких ВР</a:t>
             </a:r>
           </a:p>
           <a:p>
             <a:r>
-              <a:rPr lang="ru-RU" sz="2200" dirty="0"/>
+              <a:rPr lang="ru-RU" sz="2300" dirty="0"/>
               <a:t>Сезонность можно определить </a:t>
             </a:r>
           </a:p>
           <a:p>
             <a:pPr lvl="1"/>
             <a:r>
-              <a:rPr lang="ru-RU" sz="1800" dirty="0"/>
+              <a:rPr lang="ru-RU" sz="2300" dirty="0"/>
               <a:t>при сравнении сегментов размером с 1 или несколько сезонов (визуально</a:t>
             </a:r>
             <a:r>
-              <a:rPr lang="en-US" sz="1800" dirty="0"/>
+              <a:rPr lang="en-US" sz="2300" dirty="0"/>
               <a:t> </a:t>
             </a:r>
             <a:r>
-              <a:rPr lang="ru-RU" sz="1800" dirty="0"/>
+              <a:rPr lang="ru-RU" sz="2300" dirty="0"/>
               <a:t>разброс, </a:t>
             </a:r>
             <a:r>
-              <a:rPr lang="ru-RU" sz="1800" dirty="0" err="1"/>
+              <a:rPr lang="ru-RU" sz="2300" dirty="0" err="1"/>
               <a:t>box</a:t>
             </a:r>
             <a:r>
-              <a:rPr lang="en-US" sz="1800" dirty="0"/>
+              <a:rPr lang="en-US" sz="2300" dirty="0"/>
               <a:t>plot,</a:t>
             </a:r>
             <a:r>
-              <a:rPr lang="ru-RU" sz="1800" dirty="0"/>
+              <a:rPr lang="ru-RU" sz="2300" dirty="0"/>
               <a:t> сравнение остатков вычитания сезонностей)</a:t>
             </a:r>
           </a:p>
           <a:p>
             <a:pPr lvl="1"/>
             <a:r>
-              <a:rPr lang="ru-RU" sz="1800" dirty="0"/>
+              <a:rPr lang="ru-RU" sz="2300" dirty="0"/>
               <a:t>Анализом ВР после сезонного дифференцирования</a:t>
             </a:r>
           </a:p>
           <a:p>
             <a:pPr lvl="1"/>
             <a:r>
-              <a:rPr lang="ru-RU" sz="1800" dirty="0"/>
+              <a:rPr lang="ru-RU" sz="2300" dirty="0"/>
               <a:t>Путем разложения ВР на сезонные компоненты</a:t>
             </a:r>
           </a:p>
           <a:p>
             <a:r>
-              <a:rPr lang="ru-RU" sz="2200" dirty="0"/>
+              <a:rPr lang="ru-RU" sz="2300" dirty="0"/>
               <a:t>Сезонность видна по графикам ACF</a:t>
             </a:r>
             <a:r>
-              <a:rPr lang="en-US" sz="2200" dirty="0"/>
+              <a:rPr lang="en-US" sz="2300" dirty="0"/>
               <a:t>/PACF </a:t>
             </a:r>
             <a:r>
-              <a:rPr lang="ru-RU" sz="2200" dirty="0"/>
+              <a:rPr lang="ru-RU" sz="2300" dirty="0"/>
               <a:t>как всплески лагов на соответствующих периодах</a:t>
             </a:r>
           </a:p>
           <a:p>
             <a:pPr lvl="1"/>
             <a:r>
-              <a:rPr lang="ru-RU" sz="2200" dirty="0"/>
+              <a:rPr lang="ru-RU" sz="2300" dirty="0"/>
               <a:t>Чтобы не спутать с цикличностью можно провести </a:t>
             </a:r>
             <a:r>
-              <a:rPr lang="ru-RU" sz="2200" dirty="0" err="1"/>
+              <a:rPr lang="ru-RU" sz="2300" dirty="0" err="1"/>
               <a:t>модицфицированный</a:t>
             </a:r>
             <a:r>
-              <a:rPr lang="ru-RU" sz="2200" dirty="0"/>
+              <a:rPr lang="ru-RU" sz="2300" dirty="0"/>
               <a:t> тест </a:t>
             </a:r>
             <a:r>
-              <a:rPr lang="ru-RU" sz="2200" dirty="0" err="1"/>
+              <a:rPr lang="ru-RU" sz="2300" dirty="0" err="1"/>
               <a:t>Льюнга</a:t>
             </a:r>
             <a:r>
-              <a:rPr lang="ru-RU" sz="2200" dirty="0"/>
+              <a:rPr lang="ru-RU" sz="2300" dirty="0"/>
               <a:t>-Бокса. Основная идея – нормировка для лагов сезонности (</a:t>
             </a:r>
             <a:r>
-              <a:rPr lang="ru-RU" sz="2200" dirty="0" err="1"/>
+              <a:rPr lang="ru-RU" sz="2300" dirty="0" err="1"/>
               <a:t>напр</a:t>
             </a:r>
             <a:r>
-              <a:rPr lang="ru-RU" sz="2200" dirty="0"/>
+              <a:rPr lang="ru-RU" sz="2300" dirty="0"/>
               <a:t> 12,24)</a:t>
             </a:r>
           </a:p>
           <a:p>
             <a:pPr lvl="1"/>
             <a:r>
-              <a:rPr lang="ru-RU" sz="1800" b="1" dirty="0"/>
+              <a:rPr lang="ru-RU" sz="2300" b="1" dirty="0"/>
               <a:t>QS</a:t>
             </a:r>
             <a:r>
-              <a:rPr lang="en-US" sz="1800" b="1" dirty="0"/>
+              <a:rPr lang="en-US" sz="2300" b="1" dirty="0"/>
               <a:t> </a:t>
             </a:r>
             <a:r>
-              <a:rPr lang="en-US" sz="1800" b="1" dirty="0" err="1"/>
+              <a:rPr lang="en-US" sz="2300" b="1" dirty="0" err="1"/>
               <a:t>те</a:t>
             </a:r>
             <a:r>
-              <a:rPr lang="ru-RU" sz="1800" b="1" dirty="0" err="1"/>
+              <a:rPr lang="ru-RU" sz="2300" b="1" dirty="0" err="1"/>
               <a:t>ст</a:t>
             </a:r>
             <a:r>
-              <a:rPr lang="ru-RU" sz="1800" b="1" dirty="0"/>
+              <a:rPr lang="ru-RU" sz="2300" b="1" dirty="0"/>
               <a:t>: вариант </a:t>
             </a:r>
             <a:r>
-              <a:rPr lang="ru-RU" sz="1800" dirty="0"/>
+              <a:rPr lang="ru-RU" sz="2300" dirty="0"/>
               <a:t>тест </a:t>
             </a:r>
             <a:r>
-              <a:rPr lang="ru-RU" sz="1800" dirty="0" err="1"/>
+              <a:rPr lang="ru-RU" sz="2300" dirty="0" err="1"/>
               <a:t>Льюнга</a:t>
             </a:r>
             <a:r>
-              <a:rPr lang="ru-RU" sz="1800" dirty="0"/>
+              <a:rPr lang="ru-RU" sz="2300" dirty="0"/>
               <a:t>-Бокса только на позитивных лага</a:t>
             </a:r>
-            <a:endParaRPr lang="ru-RU" sz="1800" b="1" dirty="0"/>
-          </a:p>
-          <a:p>
-            <a:pPr lvl="1"/>
-            <a:r>
-              <a:rPr lang="ru-RU" sz="1800" b="1" dirty="0"/>
-              <a:t>Тест Кановы-Хансена (</a:t>
-            </a:r>
-            <a:r>
-              <a:rPr lang="en" sz="1800" b="1" dirty="0"/>
+            <a:endParaRPr lang="ru-RU" sz="2300" b="1" dirty="0"/>
+          </a:p>
+          <a:p>
+            <a:r>
+              <a:rPr lang="ru-RU" sz="2300" dirty="0"/>
+              <a:t>Тест на стабильность сезонности Кановы-Хансена (</a:t>
+            </a:r>
+            <a:r>
+              <a:rPr lang="en" sz="2300" dirty="0"/>
               <a:t>Canova-Hansen Test</a:t>
             </a:r>
             <a:r>
-              <a:rPr lang="ru-RU" sz="1800" b="1" dirty="0"/>
+              <a:rPr lang="ru-RU" sz="2300" dirty="0"/>
               <a:t>, </a:t>
             </a:r>
             <a:r>
-              <a:rPr lang="en" b="1" dirty="0" err="1"/>
+              <a:rPr lang="en" sz="2300" dirty="0" err="1"/>
               <a:t>CHTest</a:t>
             </a:r>
             <a:r>
-              <a:rPr lang="en" sz="1800" b="1" dirty="0"/>
+              <a:rPr lang="en" sz="2300" dirty="0"/>
               <a:t>)</a:t>
             </a:r>
             <a:r>
-              <a:rPr lang="ru-RU" sz="1800" b="1" dirty="0"/>
+              <a:rPr lang="ru-RU" sz="2300" dirty="0"/>
               <a:t>:</a:t>
             </a:r>
           </a:p>
           <a:p>
             <a:pPr lvl="2"/>
             <a:r>
-              <a:rPr lang="ru-RU" sz="1400" b="1" dirty="0"/>
+              <a:rPr lang="ru-RU" sz="2300" dirty="0"/>
               <a:t>Стабильность сезонных компонент во времени – отбор нужных компонент и анализ их изменчивости</a:t>
             </a:r>
-            <a:endParaRPr lang="en" sz="1400" dirty="0"/>
+            <a:endParaRPr lang="en" sz="2300" dirty="0"/>
           </a:p>
           <a:p>
             <a:endParaRPr lang="ru-RU" sz="2200" dirty="0"/>
@@ -15206,8 +15205,8 @@
         </p:nvSpPr>
         <p:spPr>
           <a:xfrm>
-            <a:off x="196770" y="6415302"/>
-            <a:ext cx="6105644" cy="369332"/>
+            <a:off x="196770" y="6523024"/>
+            <a:ext cx="6105644" cy="276999"/>
           </a:xfrm>
           <a:prstGeom prst="rect">
             <a:avLst/>
@@ -15221,58 +15220,58 @@
           <a:lstStyle/>
           <a:p>
             <a:r>
-              <a:rPr lang="ru-RU" dirty="0" err="1"/>
+              <a:rPr lang="ru-RU" sz="1200" dirty="0" err="1"/>
               <a:t>https</a:t>
             </a:r>
             <a:r>
-              <a:rPr lang="ru-RU" dirty="0"/>
+              <a:rPr lang="ru-RU" sz="1200" dirty="0"/>
               <a:t>://</a:t>
             </a:r>
             <a:r>
-              <a:rPr lang="ru-RU" dirty="0" err="1"/>
+              <a:rPr lang="ru-RU" sz="1200" dirty="0" err="1"/>
               <a:t>palatej.github.io</a:t>
             </a:r>
             <a:r>
-              <a:rPr lang="ru-RU" dirty="0"/>
+              <a:rPr lang="ru-RU" sz="1200" dirty="0"/>
               <a:t>/</a:t>
             </a:r>
             <a:r>
-              <a:rPr lang="ru-RU" dirty="0" err="1"/>
+              <a:rPr lang="ru-RU" sz="1200" dirty="0" err="1"/>
               <a:t>pages</a:t>
             </a:r>
             <a:r>
-              <a:rPr lang="ru-RU" dirty="0"/>
+              <a:rPr lang="ru-RU" sz="1200" dirty="0"/>
               <a:t>/</a:t>
             </a:r>
             <a:r>
-              <a:rPr lang="ru-RU" dirty="0" err="1"/>
+              <a:rPr lang="ru-RU" sz="1200" dirty="0" err="1"/>
               <a:t>stats</a:t>
             </a:r>
             <a:r>
-              <a:rPr lang="ru-RU" dirty="0"/>
+              <a:rPr lang="ru-RU" sz="1200" dirty="0"/>
               <a:t>/</a:t>
             </a:r>
             <a:r>
-              <a:rPr lang="ru-RU" dirty="0" err="1"/>
+              <a:rPr lang="ru-RU" sz="1200" dirty="0" err="1"/>
               <a:t>tests</a:t>
             </a:r>
             <a:r>
-              <a:rPr lang="ru-RU" dirty="0"/>
+              <a:rPr lang="ru-RU" sz="1200" dirty="0"/>
               <a:t>/</a:t>
             </a:r>
             <a:r>
-              <a:rPr lang="ru-RU" dirty="0" err="1"/>
+              <a:rPr lang="ru-RU" sz="1200" dirty="0" err="1"/>
               <a:t>seasonality</a:t>
             </a:r>
             <a:r>
-              <a:rPr lang="ru-RU" dirty="0"/>
+              <a:rPr lang="ru-RU" sz="1200" dirty="0"/>
               <a:t>/</a:t>
             </a:r>
             <a:r>
-              <a:rPr lang="ru-RU" dirty="0" err="1"/>
+              <a:rPr lang="ru-RU" sz="1200" dirty="0" err="1"/>
               <a:t>qs.html</a:t>
             </a:r>
-            <a:endParaRPr lang="ru-RU" dirty="0"/>
+            <a:endParaRPr lang="ru-RU" sz="1200" dirty="0"/>
           </a:p>
         </p:txBody>
       </p:sp>
@@ -15290,8 +15289,8 @@
         </p:nvSpPr>
         <p:spPr>
           <a:xfrm>
-            <a:off x="145166" y="5807631"/>
-            <a:ext cx="11901668" cy="738664"/>
+            <a:off x="196770" y="6238958"/>
+            <a:ext cx="11901668" cy="253916"/>
           </a:xfrm>
           <a:prstGeom prst="rect">
             <a:avLst/>
@@ -15305,18 +15304,96 @@
           <a:lstStyle/>
           <a:p>
             <a:r>
+              <a:rPr lang="en" sz="1050" dirty="0">
+                <a:hlinkClick r:id="rId2"/>
+              </a:rPr>
+              <a:t>https://www.hse.ru/data/2014/11/13/1311639964/</a:t>
+            </a:r>
+            <a:r>
+              <a:rPr lang="ru-RU" sz="1050" dirty="0"/>
+              <a:t>Методы%20социально-экономического%20прогнозирования%20в%202т.%20т.2%20-%20Светуньков%20-%20бт.</a:t>
+            </a:r>
+            <a:r>
               <a:rPr lang="en" sz="1050" dirty="0"/>
-              <a:t>https://</a:t>
-            </a:r>
-            <a:r>
-              <a:rPr lang="en" sz="1050" dirty="0" err="1"/>
-              <a:t>www.hse.ru</a:t>
-            </a:r>
-            <a:r>
-              <a:rPr lang="en" sz="1050" dirty="0"/>
-              <a:t>/data/2014/11/13/1311639964/%D0%9C%D0%B5%D1%82%D0%BE%D0%B4%D1%8B%20%D1%81%D0%BE%D1%86%D0%B8%D0%B0%D0%BB%D1%8C%D0%BD%D0%BE-%D1%8D%D0%BA%D0%BE%D0%BD%D0%BE%D0%BC%D0%B8%D1%87%D0%B5%D1%81%D0%BA%D0%BE%D0%B3%D0%BE%20%D0%BF%D1%80%D0%BE%D0%B3%D0%BD%D0%BE%D0%B7%D0%B8%D1%80%D0%BE%D0%B2%D0%B0%D0%BD%D0%B8%D1%8F%20%D0%B2%202%D1%82.%20%D1%82.2%20-%20%D0%A1%D0%B2%D0%B5%D1%82%D1%83%D0%BD%D1%8C%D0%BA%D0%BE%D0%B2%20-%20%D0%B1%D1%82.pdf</a:t>
+              <a:t>pdf</a:t>
             </a:r>
             <a:endParaRPr lang="ru-RU" sz="1050" dirty="0"/>
+          </a:p>
+        </p:txBody>
+      </p:sp>
+      <p:sp>
+        <p:nvSpPr>
+          <p:cNvPr id="6" name="TextBox 5">
+            <a:extLst>
+              <a:ext uri="{FF2B5EF4-FFF2-40B4-BE49-F238E27FC236}">
+                <a16:creationId xmlns:a16="http://schemas.microsoft.com/office/drawing/2014/main" id="{E1360E9F-2A4D-CEC3-6B34-312655F7D6F3}"/>
+              </a:ext>
+            </a:extLst>
+          </p:cNvPr>
+          <p:cNvSpPr txBox="1"/>
+          <p:nvPr/>
+        </p:nvSpPr>
+        <p:spPr>
+          <a:xfrm>
+            <a:off x="6302414" y="6523024"/>
+            <a:ext cx="6106884" cy="261610"/>
+          </a:xfrm>
+          <a:prstGeom prst="rect">
+            <a:avLst/>
+          </a:prstGeom>
+          <a:noFill/>
+        </p:spPr>
+        <p:txBody>
+          <a:bodyPr wrap="square">
+            <a:spAutoFit/>
+          </a:bodyPr>
+          <a:lstStyle/>
+          <a:p>
+            <a:r>
+              <a:rPr lang="ru-RU" sz="1100" dirty="0" err="1"/>
+              <a:t>https</a:t>
+            </a:r>
+            <a:r>
+              <a:rPr lang="ru-RU" sz="1100" dirty="0"/>
+              <a:t>://</a:t>
+            </a:r>
+            <a:r>
+              <a:rPr lang="ru-RU" sz="1100" dirty="0" err="1"/>
+              <a:t>alkaline-ml.com</a:t>
+            </a:r>
+            <a:r>
+              <a:rPr lang="ru-RU" sz="1100" dirty="0"/>
+              <a:t>/</a:t>
+            </a:r>
+            <a:r>
+              <a:rPr lang="ru-RU" sz="1100" dirty="0" err="1"/>
+              <a:t>pmdarima</a:t>
+            </a:r>
+            <a:r>
+              <a:rPr lang="ru-RU" sz="1100" dirty="0"/>
+              <a:t>/</a:t>
+            </a:r>
+            <a:r>
+              <a:rPr lang="ru-RU" sz="1100" dirty="0" err="1"/>
+              <a:t>modules</a:t>
+            </a:r>
+            <a:r>
+              <a:rPr lang="ru-RU" sz="1100" dirty="0"/>
+              <a:t>/</a:t>
+            </a:r>
+            <a:r>
+              <a:rPr lang="ru-RU" sz="1100" dirty="0" err="1"/>
+              <a:t>generated</a:t>
+            </a:r>
+            <a:r>
+              <a:rPr lang="ru-RU" sz="1100" dirty="0"/>
+              <a:t>/</a:t>
+            </a:r>
+            <a:r>
+              <a:rPr lang="ru-RU" sz="1100" dirty="0" err="1"/>
+              <a:t>pmdarima.arima.CHTest.html</a:t>
+            </a:r>
+            <a:endParaRPr lang="ru-RU" sz="1100" dirty="0"/>
           </a:p>
         </p:txBody>
       </p:sp>
@@ -17941,7 +18018,7 @@
         </p:nvGraphicFramePr>
         <p:xfrm>
           <a:off x="228598" y="1401333"/>
-          <a:ext cx="11671666" cy="4576737"/>
+          <a:ext cx="11671666" cy="4494442"/>
         </p:xfrm>
         <a:graphic>
           <a:graphicData uri="http://schemas.openxmlformats.org/drawingml/2006/table">

--- a/2025/LEC/02-2 Разложение и наивное предсказание.pptx
+++ b/2025/LEC/02-2 Разложение и наивное предсказание.pptx
@@ -252,7 +252,7 @@
           <a:p>
             <a:fld id="{C730246F-5962-E14A-AAF2-985CCFDAC345}" type="datetimeFigureOut">
               <a:rPr lang="ru-RU" smtClean="0"/>
-              <a:t>10.08.2025</a:t>
+              <a:t>11.08.2025</a:t>
             </a:fld>
             <a:endParaRPr lang="ru-RU"/>
           </a:p>
@@ -1200,7 +1200,7 @@
           <a:p>
             <a:fld id="{44343DC6-30E4-4569-999A-C703F926F2AF}" type="datetimeFigureOut">
               <a:rPr lang="en-US" smtClean="0"/>
-              <a:t>8/10/25</a:t>
+              <a:t>8/11/2025</a:t>
             </a:fld>
             <a:endParaRPr lang="en-US"/>
           </a:p>
@@ -1400,7 +1400,7 @@
           <a:p>
             <a:fld id="{44343DC6-30E4-4569-999A-C703F926F2AF}" type="datetimeFigureOut">
               <a:rPr lang="en-US" smtClean="0"/>
-              <a:t>8/10/25</a:t>
+              <a:t>8/11/2025</a:t>
             </a:fld>
             <a:endParaRPr lang="en-US"/>
           </a:p>
@@ -1610,7 +1610,7 @@
           <a:p>
             <a:fld id="{44343DC6-30E4-4569-999A-C703F926F2AF}" type="datetimeFigureOut">
               <a:rPr lang="en-US" smtClean="0"/>
-              <a:t>8/10/25</a:t>
+              <a:t>8/11/2025</a:t>
             </a:fld>
             <a:endParaRPr lang="en-US"/>
           </a:p>
@@ -1810,7 +1810,7 @@
           <a:p>
             <a:fld id="{44343DC6-30E4-4569-999A-C703F926F2AF}" type="datetimeFigureOut">
               <a:rPr lang="en-US" smtClean="0"/>
-              <a:t>8/10/25</a:t>
+              <a:t>8/11/2025</a:t>
             </a:fld>
             <a:endParaRPr lang="en-US"/>
           </a:p>
@@ -2086,7 +2086,7 @@
           <a:p>
             <a:fld id="{44343DC6-30E4-4569-999A-C703F926F2AF}" type="datetimeFigureOut">
               <a:rPr lang="en-US" smtClean="0"/>
-              <a:t>8/10/25</a:t>
+              <a:t>8/11/2025</a:t>
             </a:fld>
             <a:endParaRPr lang="en-US"/>
           </a:p>
@@ -2354,7 +2354,7 @@
           <a:p>
             <a:fld id="{44343DC6-30E4-4569-999A-C703F926F2AF}" type="datetimeFigureOut">
               <a:rPr lang="en-US" smtClean="0"/>
-              <a:t>8/10/25</a:t>
+              <a:t>8/11/2025</a:t>
             </a:fld>
             <a:endParaRPr lang="en-US"/>
           </a:p>
@@ -2769,7 +2769,7 @@
           <a:p>
             <a:fld id="{44343DC6-30E4-4569-999A-C703F926F2AF}" type="datetimeFigureOut">
               <a:rPr lang="en-US" smtClean="0"/>
-              <a:t>8/10/25</a:t>
+              <a:t>8/11/2025</a:t>
             </a:fld>
             <a:endParaRPr lang="en-US"/>
           </a:p>
@@ -2911,7 +2911,7 @@
           <a:p>
             <a:fld id="{44343DC6-30E4-4569-999A-C703F926F2AF}" type="datetimeFigureOut">
               <a:rPr lang="en-US" smtClean="0"/>
-              <a:t>8/10/25</a:t>
+              <a:t>8/11/2025</a:t>
             </a:fld>
             <a:endParaRPr lang="en-US"/>
           </a:p>
@@ -3024,7 +3024,7 @@
           <a:p>
             <a:fld id="{44343DC6-30E4-4569-999A-C703F926F2AF}" type="datetimeFigureOut">
               <a:rPr lang="en-US" smtClean="0"/>
-              <a:t>8/10/25</a:t>
+              <a:t>8/11/2025</a:t>
             </a:fld>
             <a:endParaRPr lang="en-US"/>
           </a:p>
@@ -3337,7 +3337,7 @@
           <a:p>
             <a:fld id="{44343DC6-30E4-4569-999A-C703F926F2AF}" type="datetimeFigureOut">
               <a:rPr lang="en-US" smtClean="0"/>
-              <a:t>8/10/25</a:t>
+              <a:t>8/11/2025</a:t>
             </a:fld>
             <a:endParaRPr lang="en-US"/>
           </a:p>
@@ -3626,7 +3626,7 @@
           <a:p>
             <a:fld id="{44343DC6-30E4-4569-999A-C703F926F2AF}" type="datetimeFigureOut">
               <a:rPr lang="en-US" smtClean="0"/>
-              <a:t>8/10/25</a:t>
+              <a:t>8/11/2025</a:t>
             </a:fld>
             <a:endParaRPr lang="en-US"/>
           </a:p>
@@ -3869,7 +3869,7 @@
           <a:p>
             <a:fld id="{44343DC6-30E4-4569-999A-C703F926F2AF}" type="datetimeFigureOut">
               <a:rPr lang="en-US" smtClean="0"/>
-              <a:t>8/10/25</a:t>
+              <a:t>8/11/2025</a:t>
             </a:fld>
             <a:endParaRPr lang="en-US"/>
           </a:p>
@@ -7449,6 +7449,12 @@
                         </a:rPr>
                         <a:t>Одна или </a:t>
                       </a:r>
+                      <a:r>
+                        <a:rPr lang="en-US" sz="1600" u="none" strike="noStrike" dirty="0">
+                          <a:effectLst/>
+                        </a:rPr>
+                        <a:t/>
+                      </a:r>
                       <a:br>
                         <a:rPr lang="en-US" sz="1600" u="none" strike="noStrike" dirty="0">
                           <a:effectLst/>
@@ -8541,6 +8547,12 @@
                           <a:effectLst/>
                         </a:rPr>
                         <a:t>+</a:t>
+                      </a:r>
+                      <a:r>
+                        <a:rPr lang="ru-RU" sz="1800" u="none" strike="noStrike" dirty="0">
+                          <a:effectLst/>
+                        </a:rPr>
+                        <a:t/>
                       </a:r>
                       <a:br>
                         <a:rPr lang="ru-RU" sz="1800" u="none" strike="noStrike" dirty="0">
@@ -10080,6 +10092,12 @@
                     <a:cs typeface="Times New Roman" panose="02020603050405020304" pitchFamily="18" charset="0"/>
                   </a:rPr>
                   <a:t> – это остаточная часть (шумы), </a:t>
+                </a:r>
+                <a:r>
+                  <a:rPr lang="en-US" altLang="ru-RU" sz="1800" dirty="0">
+                    <a:cs typeface="Times New Roman" panose="02020603050405020304" pitchFamily="18" charset="0"/>
+                  </a:rPr>
+                  <a:t/>
                 </a:r>
                 <a:br>
                   <a:rPr lang="en-US" altLang="ru-RU" sz="1800" dirty="0">
@@ -12229,6 +12247,12 @@
                   </a:rPr>
                   <a:t>,</a:t>
                 </a:r>
+                <a:r>
+                  <a:rPr lang="ru-RU" altLang="ru-RU" sz="2000" i="1" dirty="0">
+                    <a:cs typeface="Times New Roman" panose="02020603050405020304" pitchFamily="18" charset="0"/>
+                  </a:rPr>
+                  <a:t/>
+                </a:r>
                 <a:br>
                   <a:rPr lang="ru-RU" altLang="ru-RU" sz="2000" i="1" dirty="0">
                     <a:cs typeface="Times New Roman" panose="02020603050405020304" pitchFamily="18" charset="0"/>
@@ -14913,6 +14937,14 @@
   <p:clrMapOvr>
     <a:masterClrMapping/>
   </p:clrMapOvr>
+  <mc:AlternateContent xmlns:mc="http://schemas.openxmlformats.org/markup-compatibility/2006">
+    <mc:Choice xmlns:p14="http://schemas.microsoft.com/office/powerpoint/2010/main" Requires="p14">
+      <p:transition spd="slow" p14:dur="2000"/>
+    </mc:Choice>
+    <mc:Fallback>
+      <p:transition spd="slow"/>
+    </mc:Fallback>
+  </mc:AlternateContent>
 </p:sld>
 </file>
 
@@ -17043,7 +17075,7 @@
         <p:spPr>
           <a:xfrm>
             <a:off x="182881" y="809626"/>
-            <a:ext cx="11675744" cy="5293993"/>
+            <a:ext cx="11675744" cy="5575794"/>
           </a:xfrm>
         </p:spPr>
         <p:txBody>
@@ -17150,12 +17182,12 @@
               <a:t>, четкая </a:t>
             </a:r>
             <a:r>
-              <a:rPr lang="ru-RU" sz="2200" dirty="0" err="1"/>
-              <a:t>структра</a:t>
+              <a:rPr lang="ru-RU" sz="2200" dirty="0" smtClean="0"/>
+              <a:t>структура </a:t>
             </a:r>
             <a:r>
               <a:rPr lang="ru-RU" sz="2200" dirty="0"/>
-              <a:t> могут быть более точные методы, например</a:t>
+              <a:t>могут быть более точные методы, например</a:t>
             </a:r>
           </a:p>
           <a:p>
@@ -17177,12 +17209,12 @@
               <a:t>для </a:t>
             </a:r>
             <a:r>
-              <a:rPr lang="ru-RU" sz="2200" dirty="0" err="1"/>
-              <a:t>бизнесс</a:t>
+              <a:rPr lang="ru-RU" sz="2200" dirty="0" smtClean="0"/>
+              <a:t>бизнес-процессов </a:t>
             </a:r>
             <a:r>
               <a:rPr lang="ru-RU" sz="2200" dirty="0"/>
-              <a:t>-процессов ВР</a:t>
+              <a:t>ВР</a:t>
             </a:r>
           </a:p>
           <a:p>
@@ -17193,7 +17225,18 @@
             </a:r>
             <a:r>
               <a:rPr lang="ru-RU" sz="2200" dirty="0"/>
-              <a:t>для сезонной корректировки в экономических данных (глобальная экономика)</a:t>
+              <a:t>для сезонной корректировки в экономических данных (глобальная экономика</a:t>
+            </a:r>
+            <a:r>
+              <a:rPr lang="ru-RU" sz="2200" dirty="0" smtClean="0"/>
+              <a:t>)</a:t>
+            </a:r>
+            <a:endParaRPr lang="en-US" sz="2200" dirty="0" smtClean="0"/>
+          </a:p>
+          <a:p>
+            <a:r>
+              <a:rPr lang="ru-RU" sz="2200" dirty="0" smtClean="0"/>
+              <a:t>Также некоторые методы предсказания предоставляют результаты внутренней декомпозиции ВР</a:t>
             </a:r>
             <a:endParaRPr lang="en-US" sz="2200" dirty="0"/>
           </a:p>
@@ -17229,6 +17272,62 @@
           </a:fontRef>
         </p:style>
       </p:cxnSp>
+      <p:sp>
+        <p:nvSpPr>
+          <p:cNvPr id="4" name="Прямоугольник 3"/>
+          <p:cNvSpPr/>
+          <p:nvPr/>
+        </p:nvSpPr>
+        <p:spPr>
+          <a:xfrm>
+            <a:off x="5762625" y="6385420"/>
+            <a:ext cx="6096000" cy="276999"/>
+          </a:xfrm>
+          <a:prstGeom prst="rect">
+            <a:avLst/>
+          </a:prstGeom>
+        </p:spPr>
+        <p:txBody>
+          <a:bodyPr>
+            <a:spAutoFit/>
+          </a:bodyPr>
+          <a:lstStyle/>
+          <a:p>
+            <a:r>
+              <a:rPr lang="ru-RU" sz="1200" dirty="0"/>
+              <a:t>https://otexts.com/fpppy/nbs/12-advanced.html#example-half-hourly-electricity-demand</a:t>
+            </a:r>
+          </a:p>
+        </p:txBody>
+      </p:sp>
+      <p:sp>
+        <p:nvSpPr>
+          <p:cNvPr id="6" name="Прямоугольник 5"/>
+          <p:cNvSpPr/>
+          <p:nvPr/>
+        </p:nvSpPr>
+        <p:spPr>
+          <a:xfrm>
+            <a:off x="182881" y="6523919"/>
+            <a:ext cx="3573414" cy="276999"/>
+          </a:xfrm>
+          <a:prstGeom prst="rect">
+            <a:avLst/>
+          </a:prstGeom>
+        </p:spPr>
+        <p:txBody>
+          <a:bodyPr wrap="none">
+            <a:spAutoFit/>
+          </a:bodyPr>
+          <a:lstStyle/>
+          <a:p>
+            <a:r>
+              <a:rPr lang="ru-RU" sz="1200" dirty="0"/>
+              <a:t>https://otexts.com/fpppy/nbs/03-decomposition.html</a:t>
+            </a:r>
+          </a:p>
+        </p:txBody>
+      </p:sp>
     </p:spTree>
     <p:extLst>
       <p:ext uri="{BB962C8B-B14F-4D97-AF65-F5344CB8AC3E}">

--- a/2025/LEC/02-2 Разложение и наивное предсказание.pptx
+++ b/2025/LEC/02-2 Разложение и наивное предсказание.pptx
@@ -5,7 +5,7 @@
     <p:sldMasterId id="2147483648" r:id="rId1"/>
   </p:sldMasterIdLst>
   <p:notesMasterIdLst>
-    <p:notesMasterId r:id="rId26"/>
+    <p:notesMasterId r:id="rId27"/>
   </p:notesMasterIdLst>
   <p:sldIdLst>
     <p:sldId id="256" r:id="rId2"/>
@@ -32,6 +32,7 @@
     <p:sldId id="451" r:id="rId23"/>
     <p:sldId id="450" r:id="rId24"/>
     <p:sldId id="452" r:id="rId25"/>
+    <p:sldId id="472" r:id="rId26"/>
   </p:sldIdLst>
   <p:sldSz cx="12192000" cy="6858000"/>
   <p:notesSz cx="6858000" cy="9144000"/>
@@ -159,6 +160,7 @@
             <p14:sldId id="451"/>
             <p14:sldId id="450"/>
             <p14:sldId id="452"/>
+            <p14:sldId id="472"/>
           </p14:sldIdLst>
         </p14:section>
       </p14:sectionLst>
@@ -252,7 +254,7 @@
           <a:p>
             <a:fld id="{C730246F-5962-E14A-AAF2-985CCFDAC345}" type="datetimeFigureOut">
               <a:rPr lang="ru-RU" smtClean="0"/>
-              <a:t>11.08.2025</a:t>
+              <a:t>20.08.2025</a:t>
             </a:fld>
             <a:endParaRPr lang="ru-RU"/>
           </a:p>
@@ -1200,7 +1202,7 @@
           <a:p>
             <a:fld id="{44343DC6-30E4-4569-999A-C703F926F2AF}" type="datetimeFigureOut">
               <a:rPr lang="en-US" smtClean="0"/>
-              <a:t>8/11/2025</a:t>
+              <a:t>8/20/2025</a:t>
             </a:fld>
             <a:endParaRPr lang="en-US"/>
           </a:p>
@@ -1400,7 +1402,7 @@
           <a:p>
             <a:fld id="{44343DC6-30E4-4569-999A-C703F926F2AF}" type="datetimeFigureOut">
               <a:rPr lang="en-US" smtClean="0"/>
-              <a:t>8/11/2025</a:t>
+              <a:t>8/20/2025</a:t>
             </a:fld>
             <a:endParaRPr lang="en-US"/>
           </a:p>
@@ -1610,7 +1612,7 @@
           <a:p>
             <a:fld id="{44343DC6-30E4-4569-999A-C703F926F2AF}" type="datetimeFigureOut">
               <a:rPr lang="en-US" smtClean="0"/>
-              <a:t>8/11/2025</a:t>
+              <a:t>8/20/2025</a:t>
             </a:fld>
             <a:endParaRPr lang="en-US"/>
           </a:p>
@@ -1810,7 +1812,7 @@
           <a:p>
             <a:fld id="{44343DC6-30E4-4569-999A-C703F926F2AF}" type="datetimeFigureOut">
               <a:rPr lang="en-US" smtClean="0"/>
-              <a:t>8/11/2025</a:t>
+              <a:t>8/20/2025</a:t>
             </a:fld>
             <a:endParaRPr lang="en-US"/>
           </a:p>
@@ -2086,7 +2088,7 @@
           <a:p>
             <a:fld id="{44343DC6-30E4-4569-999A-C703F926F2AF}" type="datetimeFigureOut">
               <a:rPr lang="en-US" smtClean="0"/>
-              <a:t>8/11/2025</a:t>
+              <a:t>8/20/2025</a:t>
             </a:fld>
             <a:endParaRPr lang="en-US"/>
           </a:p>
@@ -2354,7 +2356,7 @@
           <a:p>
             <a:fld id="{44343DC6-30E4-4569-999A-C703F926F2AF}" type="datetimeFigureOut">
               <a:rPr lang="en-US" smtClean="0"/>
-              <a:t>8/11/2025</a:t>
+              <a:t>8/20/2025</a:t>
             </a:fld>
             <a:endParaRPr lang="en-US"/>
           </a:p>
@@ -2769,7 +2771,7 @@
           <a:p>
             <a:fld id="{44343DC6-30E4-4569-999A-C703F926F2AF}" type="datetimeFigureOut">
               <a:rPr lang="en-US" smtClean="0"/>
-              <a:t>8/11/2025</a:t>
+              <a:t>8/20/2025</a:t>
             </a:fld>
             <a:endParaRPr lang="en-US"/>
           </a:p>
@@ -2911,7 +2913,7 @@
           <a:p>
             <a:fld id="{44343DC6-30E4-4569-999A-C703F926F2AF}" type="datetimeFigureOut">
               <a:rPr lang="en-US" smtClean="0"/>
-              <a:t>8/11/2025</a:t>
+              <a:t>8/20/2025</a:t>
             </a:fld>
             <a:endParaRPr lang="en-US"/>
           </a:p>
@@ -3024,7 +3026,7 @@
           <a:p>
             <a:fld id="{44343DC6-30E4-4569-999A-C703F926F2AF}" type="datetimeFigureOut">
               <a:rPr lang="en-US" smtClean="0"/>
-              <a:t>8/11/2025</a:t>
+              <a:t>8/20/2025</a:t>
             </a:fld>
             <a:endParaRPr lang="en-US"/>
           </a:p>
@@ -3337,7 +3339,7 @@
           <a:p>
             <a:fld id="{44343DC6-30E4-4569-999A-C703F926F2AF}" type="datetimeFigureOut">
               <a:rPr lang="en-US" smtClean="0"/>
-              <a:t>8/11/2025</a:t>
+              <a:t>8/20/2025</a:t>
             </a:fld>
             <a:endParaRPr lang="en-US"/>
           </a:p>
@@ -3626,7 +3628,7 @@
           <a:p>
             <a:fld id="{44343DC6-30E4-4569-999A-C703F926F2AF}" type="datetimeFigureOut">
               <a:rPr lang="en-US" smtClean="0"/>
-              <a:t>8/11/2025</a:t>
+              <a:t>8/20/2025</a:t>
             </a:fld>
             <a:endParaRPr lang="en-US"/>
           </a:p>
@@ -3869,7 +3871,7 @@
           <a:p>
             <a:fld id="{44343DC6-30E4-4569-999A-C703F926F2AF}" type="datetimeFigureOut">
               <a:rPr lang="en-US" smtClean="0"/>
-              <a:t>8/11/2025</a:t>
+              <a:t>8/20/2025</a:t>
             </a:fld>
             <a:endParaRPr lang="en-US"/>
           </a:p>
@@ -14937,11 +14939,11 @@
   <p:clrMapOvr>
     <a:masterClrMapping/>
   </p:clrMapOvr>
-  <mc:AlternateContent xmlns:mc="http://schemas.openxmlformats.org/markup-compatibility/2006">
-    <mc:Choice xmlns:p14="http://schemas.microsoft.com/office/powerpoint/2010/main" Requires="p14">
+  <mc:AlternateContent xmlns:mc="http://schemas.openxmlformats.org/markup-compatibility/2006" xmlns:p14="http://schemas.microsoft.com/office/powerpoint/2010/main">
+    <mc:Choice Requires="p14">
       <p:transition spd="slow" p14:dur="2000"/>
     </mc:Choice>
-    <mc:Fallback>
+    <mc:Fallback xmlns="">
       <p:transition spd="slow"/>
     </mc:Fallback>
   </mc:AlternateContent>
@@ -17236,7 +17238,27 @@
           <a:p>
             <a:r>
               <a:rPr lang="ru-RU" sz="2200" dirty="0" smtClean="0"/>
-              <a:t>Также некоторые методы предсказания предоставляют результаты внутренней декомпозиции ВР</a:t>
+              <a:t>Также некоторые методы предсказания предоставляют результаты внутренней декомпозиции </a:t>
+            </a:r>
+            <a:r>
+              <a:rPr lang="ru-RU" sz="2200" dirty="0" smtClean="0"/>
+              <a:t>ВР </a:t>
+            </a:r>
+            <a:r>
+              <a:rPr lang="en-US" sz="2200" dirty="0" smtClean="0"/>
+              <a:t>(Prophet, TBATS, </a:t>
+            </a:r>
+            <a:r>
+              <a:rPr lang="ru-RU" sz="2200" dirty="0" smtClean="0"/>
+              <a:t>и </a:t>
+            </a:r>
+            <a:r>
+              <a:rPr lang="ru-RU" sz="2200" dirty="0" err="1" smtClean="0"/>
+              <a:t>др</a:t>
+            </a:r>
+            <a:r>
+              <a:rPr lang="ru-RU" sz="2200" dirty="0" smtClean="0"/>
+              <a:t>).</a:t>
             </a:r>
             <a:endParaRPr lang="en-US" sz="2200" dirty="0"/>
           </a:p>
@@ -17332,6 +17354,166 @@
     <p:extLst>
       <p:ext uri="{BB962C8B-B14F-4D97-AF65-F5344CB8AC3E}">
         <p14:creationId xmlns:p14="http://schemas.microsoft.com/office/powerpoint/2010/main" val="1494998568"/>
+      </p:ext>
+    </p:extLst>
+  </p:cSld>
+  <p:clrMapOvr>
+    <a:masterClrMapping/>
+  </p:clrMapOvr>
+</p:sld>
+</file>
+
+<file path=ppt/slides/slide25.xml><?xml version="1.0" encoding="utf-8"?>
+<p:sld xmlns:a="http://schemas.openxmlformats.org/drawingml/2006/main" xmlns:r="http://schemas.openxmlformats.org/officeDocument/2006/relationships" xmlns:p="http://schemas.openxmlformats.org/presentationml/2006/main">
+  <p:cSld>
+    <p:spTree>
+      <p:nvGrpSpPr>
+        <p:cNvPr id="1" name=""/>
+        <p:cNvGrpSpPr/>
+        <p:nvPr/>
+      </p:nvGrpSpPr>
+      <p:grpSpPr>
+        <a:xfrm>
+          <a:off x="0" y="0"/>
+          <a:ext cx="0" cy="0"/>
+          <a:chOff x="0" y="0"/>
+          <a:chExt cx="0" cy="0"/>
+        </a:xfrm>
+      </p:grpSpPr>
+      <p:sp>
+        <p:nvSpPr>
+          <p:cNvPr id="2" name="Заголовок 1"/>
+          <p:cNvSpPr>
+            <a:spLocks noGrp="1"/>
+          </p:cNvSpPr>
+          <p:nvPr>
+            <p:ph type="title"/>
+          </p:nvPr>
+        </p:nvSpPr>
+        <p:spPr>
+          <a:xfrm>
+            <a:off x="275303" y="365126"/>
+            <a:ext cx="11078497" cy="657430"/>
+          </a:xfrm>
+        </p:spPr>
+        <p:txBody>
+          <a:bodyPr>
+            <a:normAutofit fontScale="90000"/>
+          </a:bodyPr>
+          <a:lstStyle/>
+          <a:p>
+            <a:r>
+              <a:rPr lang="ru-RU" dirty="0" smtClean="0"/>
+              <a:t>Вопросы для самоконтроля</a:t>
+            </a:r>
+            <a:endParaRPr lang="ru-RU" dirty="0"/>
+          </a:p>
+        </p:txBody>
+      </p:sp>
+      <p:sp>
+        <p:nvSpPr>
+          <p:cNvPr id="3" name="Объект 2"/>
+          <p:cNvSpPr>
+            <a:spLocks noGrp="1"/>
+          </p:cNvSpPr>
+          <p:nvPr>
+            <p:ph idx="1"/>
+          </p:nvPr>
+        </p:nvSpPr>
+        <p:spPr>
+          <a:xfrm>
+            <a:off x="186813" y="1111046"/>
+            <a:ext cx="11700387" cy="5427406"/>
+          </a:xfrm>
+        </p:spPr>
+        <p:txBody>
+          <a:bodyPr>
+            <a:normAutofit lnSpcReduction="10000"/>
+          </a:bodyPr>
+          <a:lstStyle/>
+          <a:p>
+            <a:r>
+              <a:rPr lang="ru-RU" dirty="0" smtClean="0"/>
+              <a:t>Назовите какие подходы к предсказанию ВР имеют место сегодня. Приведите примеры использования подходов. Какие подходы (и методы) стоит рассматривать как </a:t>
+            </a:r>
+            <a:r>
+              <a:rPr lang="ru-RU" dirty="0" err="1" smtClean="0"/>
+              <a:t>бейзлайн</a:t>
+            </a:r>
+            <a:r>
+              <a:rPr lang="ru-RU" dirty="0" smtClean="0"/>
+              <a:t>, какие проверять в последнюю очередь.</a:t>
+            </a:r>
+          </a:p>
+          <a:p>
+            <a:r>
+              <a:rPr lang="ru-RU" dirty="0" smtClean="0"/>
+              <a:t>Объясните логику развития соревнований </a:t>
+            </a:r>
+            <a:r>
+              <a:rPr lang="ru-RU" dirty="0" err="1" smtClean="0"/>
+              <a:t>Макридакиса</a:t>
+            </a:r>
+            <a:r>
+              <a:rPr lang="ru-RU" dirty="0" smtClean="0"/>
+              <a:t>. Какие выводы можно сделать из этих соревнований. Приведите примеры практического использования и соответствующих задач, которые следует из результатов соревнований.</a:t>
+            </a:r>
+          </a:p>
+          <a:p>
+            <a:r>
+              <a:rPr lang="ru-RU" dirty="0" smtClean="0"/>
+              <a:t> Назовите основные особенности подходов для разложения ВР. Объясните цель использования разложения. Расскажите как работает </a:t>
+            </a:r>
+            <a:r>
+              <a:rPr lang="en-US" dirty="0" smtClean="0"/>
+              <a:t>STL </a:t>
+            </a:r>
+            <a:r>
+              <a:rPr lang="ru-RU" dirty="0" smtClean="0"/>
+              <a:t>разложение. В каких случаях </a:t>
+            </a:r>
+            <a:r>
+              <a:rPr lang="en-US" dirty="0" smtClean="0"/>
+              <a:t>STL </a:t>
+            </a:r>
+            <a:r>
+              <a:rPr lang="ru-RU" dirty="0" smtClean="0"/>
+              <a:t>недостаточно?</a:t>
+            </a:r>
+          </a:p>
+          <a:p>
+            <a:r>
+              <a:rPr lang="ru-RU" dirty="0" smtClean="0"/>
+              <a:t>Объясните цели использования и подходы к </a:t>
+            </a:r>
+            <a:r>
+              <a:rPr lang="en-US" dirty="0" err="1" smtClean="0"/>
+              <a:t>detrend</a:t>
+            </a:r>
+            <a:r>
+              <a:rPr lang="en-US" dirty="0" smtClean="0"/>
+              <a:t>, </a:t>
+            </a:r>
+            <a:r>
+              <a:rPr lang="en-US" dirty="0" err="1" smtClean="0"/>
+              <a:t>deseasonlizer</a:t>
+            </a:r>
+            <a:r>
+              <a:rPr lang="en-US" dirty="0" smtClean="0"/>
+              <a:t>, </a:t>
+            </a:r>
+            <a:r>
+              <a:rPr lang="ru-RU" dirty="0" smtClean="0"/>
+              <a:t>в каких случаях этих подходов недостаточно? Какие шаги можно предложить для решения проблемы.</a:t>
+            </a:r>
+            <a:endParaRPr lang="ru-RU" dirty="0"/>
+          </a:p>
+        </p:txBody>
+      </p:sp>
+    </p:spTree>
+    <p:extLst>
+      <p:ext uri="{BB962C8B-B14F-4D97-AF65-F5344CB8AC3E}">
+        <p14:creationId xmlns:p14="http://schemas.microsoft.com/office/powerpoint/2010/main" val="1397438270"/>
       </p:ext>
     </p:extLst>
   </p:cSld>
@@ -18117,7 +18299,7 @@
         </p:nvGraphicFramePr>
         <p:xfrm>
           <a:off x="228598" y="1401333"/>
-          <a:ext cx="11671666" cy="4494442"/>
+          <a:ext cx="11671666" cy="4576737"/>
         </p:xfrm>
         <a:graphic>
           <a:graphicData uri="http://schemas.openxmlformats.org/drawingml/2006/table">
@@ -20566,11 +20748,16 @@
           </p:cNvGraphicFramePr>
           <p:nvPr>
             <p:ph idx="1"/>
+            <p:extLst>
+              <p:ext uri="{D42A27DB-BD31-4B8C-83A1-F6EECF244321}">
+                <p14:modId xmlns:p14="http://schemas.microsoft.com/office/powerpoint/2010/main" val="608645650"/>
+              </p:ext>
+            </p:extLst>
           </p:nvPr>
         </p:nvGraphicFramePr>
         <p:xfrm>
           <a:off x="300443" y="587484"/>
-          <a:ext cx="11521444" cy="5862434"/>
+          <a:ext cx="11521444" cy="5785729"/>
         </p:xfrm>
         <a:graphic>
           <a:graphicData uri="http://schemas.openxmlformats.org/drawingml/2006/table">
@@ -20848,7 +21035,7 @@
                     <a:bodyPr/>
                     <a:lstStyle/>
                     <a:p>
-                      <a:pPr>
+                      <a:pPr algn="ctr">
                         <a:lnSpc>
                           <a:spcPct val="107000"/>
                         </a:lnSpc>
@@ -20898,7 +21085,7 @@
                     <a:bodyPr/>
                     <a:lstStyle/>
                     <a:p>
-                      <a:pPr>
+                      <a:pPr algn="ctr">
                         <a:lnSpc>
                           <a:spcPct val="107000"/>
                         </a:lnSpc>
@@ -20988,7 +21175,7 @@
                     <a:bodyPr/>
                     <a:lstStyle/>
                     <a:p>
-                      <a:pPr>
+                      <a:pPr algn="ctr">
                         <a:lnSpc>
                           <a:spcPct val="107000"/>
                         </a:lnSpc>
@@ -21020,7 +21207,7 @@
                     <a:bodyPr/>
                     <a:lstStyle/>
                     <a:p>
-                      <a:pPr marL="0" marR="0" indent="0" algn="l" defTabSz="914400" rtl="0" eaLnBrk="1" fontAlgn="auto" latinLnBrk="0" hangingPunct="1">
+                      <a:pPr marL="0" marR="0" indent="0" algn="ctr" defTabSz="914400" rtl="0" eaLnBrk="1" fontAlgn="auto" latinLnBrk="0" hangingPunct="1">
                         <a:lnSpc>
                           <a:spcPct val="107000"/>
                         </a:lnSpc>
@@ -21115,7 +21302,7 @@
                     <a:bodyPr/>
                     <a:lstStyle/>
                     <a:p>
-                      <a:pPr marL="0" marR="0" indent="0" algn="l" defTabSz="914400" rtl="0" eaLnBrk="1" fontAlgn="auto" latinLnBrk="0" hangingPunct="1">
+                      <a:pPr marL="0" marR="0" indent="0" algn="ctr" defTabSz="914400" rtl="0" eaLnBrk="1" fontAlgn="auto" latinLnBrk="0" hangingPunct="1">
                         <a:lnSpc>
                           <a:spcPct val="107000"/>
                         </a:lnSpc>
@@ -21149,7 +21336,7 @@
                       </a:endParaRPr>
                     </a:p>
                     <a:p>
-                      <a:pPr>
+                      <a:pPr algn="ctr">
                         <a:lnSpc>
                           <a:spcPct val="107000"/>
                         </a:lnSpc>
@@ -21172,7 +21359,7 @@
                     <a:bodyPr/>
                     <a:lstStyle/>
                     <a:p>
-                      <a:pPr>
+                      <a:pPr algn="ctr">
                         <a:lnSpc>
                           <a:spcPct val="107000"/>
                         </a:lnSpc>
@@ -21213,7 +21400,7 @@
                     <a:bodyPr/>
                     <a:lstStyle/>
                     <a:p>
-                      <a:pPr>
+                      <a:pPr algn="ctr">
                         <a:lnSpc>
                           <a:spcPct val="107000"/>
                         </a:lnSpc>
@@ -21306,7 +21493,7 @@
                     <a:bodyPr/>
                     <a:lstStyle/>
                     <a:p>
-                      <a:pPr>
+                      <a:pPr algn="ctr">
                         <a:lnSpc>
                           <a:spcPct val="107000"/>
                         </a:lnSpc>
@@ -21345,7 +21532,7 @@
                     <a:bodyPr/>
                     <a:lstStyle/>
                     <a:p>
-                      <a:pPr>
+                      <a:pPr algn="ctr">
                         <a:lnSpc>
                           <a:spcPct val="107000"/>
                         </a:lnSpc>
@@ -21376,7 +21563,7 @@
                     <a:bodyPr/>
                     <a:lstStyle/>
                     <a:p>
-                      <a:pPr>
+                      <a:pPr algn="ctr">
                         <a:lnSpc>
                           <a:spcPct val="107000"/>
                         </a:lnSpc>
@@ -21408,7 +21595,7 @@
                     <a:bodyPr/>
                     <a:lstStyle/>
                     <a:p>
-                      <a:pPr>
+                      <a:pPr algn="ctr">
                         <a:lnSpc>
                           <a:spcPct val="107000"/>
                         </a:lnSpc>
@@ -21435,7 +21622,7 @@
                     <a:bodyPr/>
                     <a:lstStyle/>
                     <a:p>
-                      <a:pPr marL="0" marR="0" indent="0" algn="l" defTabSz="914400" rtl="0" eaLnBrk="1" fontAlgn="auto" latinLnBrk="0" hangingPunct="1">
+                      <a:pPr marL="0" marR="0" indent="0" algn="ctr" defTabSz="914400" rtl="0" eaLnBrk="1" fontAlgn="auto" latinLnBrk="0" hangingPunct="1">
                         <a:lnSpc>
                           <a:spcPct val="107000"/>
                         </a:lnSpc>
@@ -21476,7 +21663,7 @@
                     <a:bodyPr/>
                     <a:lstStyle/>
                     <a:p>
-                      <a:pPr>
+                      <a:pPr algn="ctr">
                         <a:lnSpc>
                           <a:spcPct val="107000"/>
                         </a:lnSpc>
@@ -21503,7 +21690,7 @@
                     <a:bodyPr/>
                     <a:lstStyle/>
                     <a:p>
-                      <a:pPr>
+                      <a:pPr algn="ctr">
                         <a:lnSpc>
                           <a:spcPct val="107000"/>
                         </a:lnSpc>
@@ -21578,7 +21765,7 @@
                     <a:bodyPr/>
                     <a:lstStyle/>
                     <a:p>
-                      <a:pPr>
+                      <a:pPr algn="ctr">
                         <a:lnSpc>
                           <a:spcPct val="107000"/>
                         </a:lnSpc>
@@ -21613,7 +21800,7 @@
                     <a:bodyPr/>
                     <a:lstStyle/>
                     <a:p>
-                      <a:pPr>
+                      <a:pPr algn="ctr">
                         <a:lnSpc>
                           <a:spcPct val="107000"/>
                         </a:lnSpc>
@@ -21666,7 +21853,7 @@
                     <a:bodyPr/>
                     <a:lstStyle/>
                     <a:p>
-                      <a:pPr>
+                      <a:pPr algn="ctr">
                         <a:lnSpc>
                           <a:spcPct val="107000"/>
                         </a:lnSpc>
@@ -21713,7 +21900,7 @@
                     <a:bodyPr/>
                     <a:lstStyle/>
                     <a:p>
-                      <a:pPr>
+                      <a:pPr algn="ctr">
                         <a:lnSpc>
                           <a:spcPct val="107000"/>
                         </a:lnSpc>
@@ -21766,7 +21953,7 @@
                     <a:bodyPr/>
                     <a:lstStyle/>
                     <a:p>
-                      <a:pPr>
+                      <a:pPr algn="ctr">
                         <a:lnSpc>
                           <a:spcPct val="107000"/>
                         </a:lnSpc>
@@ -21801,7 +21988,7 @@
                     <a:bodyPr/>
                     <a:lstStyle/>
                     <a:p>
-                      <a:pPr>
+                      <a:pPr algn="ctr">
                         <a:lnSpc>
                           <a:spcPct val="107000"/>
                         </a:lnSpc>
@@ -21854,7 +22041,7 @@
                     <a:bodyPr/>
                     <a:lstStyle/>
                     <a:p>
-                      <a:pPr>
+                      <a:pPr algn="ctr">
                         <a:lnSpc>
                           <a:spcPct val="107000"/>
                         </a:lnSpc>
@@ -21902,7 +22089,7 @@
                     <a:bodyPr/>
                     <a:lstStyle/>
                     <a:p>
-                      <a:pPr>
+                      <a:pPr algn="ctr">
                         <a:lnSpc>
                           <a:spcPct val="107000"/>
                         </a:lnSpc>
@@ -21931,7 +22118,7 @@
                     <a:bodyPr/>
                     <a:lstStyle/>
                     <a:p>
-                      <a:pPr>
+                      <a:pPr algn="ctr">
                         <a:lnSpc>
                           <a:spcPct val="107000"/>
                         </a:lnSpc>
@@ -21999,7 +22186,7 @@
                     <a:bodyPr/>
                     <a:lstStyle/>
                     <a:p>
-                      <a:pPr>
+                      <a:pPr algn="ctr">
                         <a:lnSpc>
                           <a:spcPct val="107000"/>
                         </a:lnSpc>
@@ -22034,7 +22221,7 @@
                     <a:bodyPr/>
                     <a:lstStyle/>
                     <a:p>
-                      <a:pPr>
+                      <a:pPr algn="ctr">
                         <a:lnSpc>
                           <a:spcPct val="107000"/>
                         </a:lnSpc>
@@ -22087,7 +22274,7 @@
                     <a:bodyPr/>
                     <a:lstStyle/>
                     <a:p>
-                      <a:pPr>
+                      <a:pPr algn="ctr">
                         <a:lnSpc>
                           <a:spcPct val="107000"/>
                         </a:lnSpc>
@@ -22134,7 +22321,7 @@
                     <a:bodyPr/>
                     <a:lstStyle/>
                     <a:p>
-                      <a:pPr>
+                      <a:pPr algn="ctr">
                         <a:lnSpc>
                           <a:spcPct val="107000"/>
                         </a:lnSpc>
@@ -22163,7 +22350,7 @@
                     <a:bodyPr/>
                     <a:lstStyle/>
                     <a:p>
-                      <a:pPr>
+                      <a:pPr algn="ctr">
                         <a:lnSpc>
                           <a:spcPct val="107000"/>
                         </a:lnSpc>
@@ -22220,7 +22407,7 @@
                     <a:bodyPr/>
                     <a:lstStyle/>
                     <a:p>
-                      <a:pPr>
+                      <a:pPr algn="ctr">
                         <a:lnSpc>
                           <a:spcPct val="107000"/>
                         </a:lnSpc>
@@ -22261,7 +22448,7 @@
                     <a:bodyPr/>
                     <a:lstStyle/>
                     <a:p>
-                      <a:pPr>
+                      <a:pPr algn="ctr">
                         <a:lnSpc>
                           <a:spcPct val="107000"/>
                         </a:lnSpc>
@@ -22383,7 +22570,7 @@
                     <a:bodyPr/>
                     <a:lstStyle/>
                     <a:p>
-                      <a:pPr>
+                      <a:pPr algn="ctr">
                         <a:lnSpc>
                           <a:spcPct val="107000"/>
                         </a:lnSpc>
@@ -22424,7 +22611,7 @@
                     <a:bodyPr/>
                     <a:lstStyle/>
                     <a:p>
-                      <a:pPr>
+                      <a:pPr algn="ctr">
                         <a:lnSpc>
                           <a:spcPct val="107000"/>
                         </a:lnSpc>
@@ -22528,7 +22715,7 @@
                     <a:bodyPr/>
                     <a:lstStyle/>
                     <a:p>
-                      <a:pPr>
+                      <a:pPr algn="ctr">
                         <a:lnSpc>
                           <a:spcPct val="107000"/>
                         </a:lnSpc>
@@ -22581,7 +22768,7 @@
                     <a:bodyPr/>
                     <a:lstStyle/>
                     <a:p>
-                      <a:pPr>
+                      <a:pPr algn="ctr">
                         <a:lnSpc>
                           <a:spcPct val="107000"/>
                         </a:lnSpc>
@@ -22607,7 +22794,7 @@
                     <a:bodyPr/>
                     <a:lstStyle/>
                     <a:p>
-                      <a:pPr>
+                      <a:pPr algn="ctr">
                         <a:lnSpc>
                           <a:spcPct val="107000"/>
                         </a:lnSpc>
@@ -22640,7 +22827,7 @@
                     <a:bodyPr/>
                     <a:lstStyle/>
                     <a:p>
-                      <a:pPr>
+                      <a:pPr algn="ctr">
                         <a:lnSpc>
                           <a:spcPct val="107000"/>
                         </a:lnSpc>
@@ -22681,7 +22868,7 @@
                     <a:bodyPr/>
                     <a:lstStyle/>
                     <a:p>
-                      <a:pPr marL="0" marR="0" indent="0" algn="l" defTabSz="914400" rtl="0" eaLnBrk="1" fontAlgn="auto" latinLnBrk="0" hangingPunct="1">
+                      <a:pPr marL="0" marR="0" indent="0" algn="ctr" defTabSz="914400" rtl="0" eaLnBrk="1" fontAlgn="auto" latinLnBrk="0" hangingPunct="1">
                         <a:lnSpc>
                           <a:spcPct val="107000"/>
                         </a:lnSpc>
@@ -22745,7 +22932,7 @@
                     <a:bodyPr/>
                     <a:lstStyle/>
                     <a:p>
-                      <a:pPr marL="0" marR="0" indent="0" algn="l" defTabSz="914400" rtl="0" eaLnBrk="1" fontAlgn="auto" latinLnBrk="0" hangingPunct="1">
+                      <a:pPr marL="0" marR="0" indent="0" algn="ctr" defTabSz="914400" rtl="0" eaLnBrk="1" fontAlgn="auto" latinLnBrk="0" hangingPunct="1">
                         <a:lnSpc>
                           <a:spcPct val="107000"/>
                         </a:lnSpc>
@@ -22813,7 +23000,7 @@
                     <a:bodyPr/>
                     <a:lstStyle/>
                     <a:p>
-                      <a:pPr>
+                      <a:pPr algn="ctr">
                         <a:lnSpc>
                           <a:spcPct val="107000"/>
                         </a:lnSpc>
@@ -22863,7 +23050,7 @@
                     <a:bodyPr/>
                     <a:lstStyle/>
                     <a:p>
-                      <a:pPr>
+                      <a:pPr algn="ctr">
                         <a:lnSpc>
                           <a:spcPct val="107000"/>
                         </a:lnSpc>
@@ -22904,7 +23091,7 @@
                     <a:bodyPr/>
                     <a:lstStyle/>
                     <a:p>
-                      <a:pPr>
+                      <a:pPr algn="ctr">
                         <a:lnSpc>
                           <a:spcPct val="107000"/>
                         </a:lnSpc>
@@ -22999,7 +23186,7 @@
                     <a:bodyPr/>
                     <a:lstStyle/>
                     <a:p>
-                      <a:pPr>
+                      <a:pPr algn="ctr">
                         <a:lnSpc>
                           <a:spcPct val="107000"/>
                         </a:lnSpc>

--- a/2025/LEC/02-2 Разложение и наивное предсказание.pptx
+++ b/2025/LEC/02-2 Разложение и наивное предсказание.pptx
@@ -254,7 +254,7 @@
           <a:p>
             <a:fld id="{C730246F-5962-E14A-AAF2-985CCFDAC345}" type="datetimeFigureOut">
               <a:rPr lang="ru-RU" smtClean="0"/>
-              <a:t>20.08.2025</a:t>
+              <a:t>29.08.2025</a:t>
             </a:fld>
             <a:endParaRPr lang="ru-RU"/>
           </a:p>
@@ -1202,7 +1202,7 @@
           <a:p>
             <a:fld id="{44343DC6-30E4-4569-999A-C703F926F2AF}" type="datetimeFigureOut">
               <a:rPr lang="en-US" smtClean="0"/>
-              <a:t>8/20/2025</a:t>
+              <a:t>8/29/2025</a:t>
             </a:fld>
             <a:endParaRPr lang="en-US"/>
           </a:p>
@@ -1402,7 +1402,7 @@
           <a:p>
             <a:fld id="{44343DC6-30E4-4569-999A-C703F926F2AF}" type="datetimeFigureOut">
               <a:rPr lang="en-US" smtClean="0"/>
-              <a:t>8/20/2025</a:t>
+              <a:t>8/29/2025</a:t>
             </a:fld>
             <a:endParaRPr lang="en-US"/>
           </a:p>
@@ -1612,7 +1612,7 @@
           <a:p>
             <a:fld id="{44343DC6-30E4-4569-999A-C703F926F2AF}" type="datetimeFigureOut">
               <a:rPr lang="en-US" smtClean="0"/>
-              <a:t>8/20/2025</a:t>
+              <a:t>8/29/2025</a:t>
             </a:fld>
             <a:endParaRPr lang="en-US"/>
           </a:p>
@@ -1812,7 +1812,7 @@
           <a:p>
             <a:fld id="{44343DC6-30E4-4569-999A-C703F926F2AF}" type="datetimeFigureOut">
               <a:rPr lang="en-US" smtClean="0"/>
-              <a:t>8/20/2025</a:t>
+              <a:t>8/29/2025</a:t>
             </a:fld>
             <a:endParaRPr lang="en-US"/>
           </a:p>
@@ -2088,7 +2088,7 @@
           <a:p>
             <a:fld id="{44343DC6-30E4-4569-999A-C703F926F2AF}" type="datetimeFigureOut">
               <a:rPr lang="en-US" smtClean="0"/>
-              <a:t>8/20/2025</a:t>
+              <a:t>8/29/2025</a:t>
             </a:fld>
             <a:endParaRPr lang="en-US"/>
           </a:p>
@@ -2356,7 +2356,7 @@
           <a:p>
             <a:fld id="{44343DC6-30E4-4569-999A-C703F926F2AF}" type="datetimeFigureOut">
               <a:rPr lang="en-US" smtClean="0"/>
-              <a:t>8/20/2025</a:t>
+              <a:t>8/29/2025</a:t>
             </a:fld>
             <a:endParaRPr lang="en-US"/>
           </a:p>
@@ -2771,7 +2771,7 @@
           <a:p>
             <a:fld id="{44343DC6-30E4-4569-999A-C703F926F2AF}" type="datetimeFigureOut">
               <a:rPr lang="en-US" smtClean="0"/>
-              <a:t>8/20/2025</a:t>
+              <a:t>8/29/2025</a:t>
             </a:fld>
             <a:endParaRPr lang="en-US"/>
           </a:p>
@@ -2913,7 +2913,7 @@
           <a:p>
             <a:fld id="{44343DC6-30E4-4569-999A-C703F926F2AF}" type="datetimeFigureOut">
               <a:rPr lang="en-US" smtClean="0"/>
-              <a:t>8/20/2025</a:t>
+              <a:t>8/29/2025</a:t>
             </a:fld>
             <a:endParaRPr lang="en-US"/>
           </a:p>
@@ -3026,7 +3026,7 @@
           <a:p>
             <a:fld id="{44343DC6-30E4-4569-999A-C703F926F2AF}" type="datetimeFigureOut">
               <a:rPr lang="en-US" smtClean="0"/>
-              <a:t>8/20/2025</a:t>
+              <a:t>8/29/2025</a:t>
             </a:fld>
             <a:endParaRPr lang="en-US"/>
           </a:p>
@@ -3339,7 +3339,7 @@
           <a:p>
             <a:fld id="{44343DC6-30E4-4569-999A-C703F926F2AF}" type="datetimeFigureOut">
               <a:rPr lang="en-US" smtClean="0"/>
-              <a:t>8/20/2025</a:t>
+              <a:t>8/29/2025</a:t>
             </a:fld>
             <a:endParaRPr lang="en-US"/>
           </a:p>
@@ -3628,7 +3628,7 @@
           <a:p>
             <a:fld id="{44343DC6-30E4-4569-999A-C703F926F2AF}" type="datetimeFigureOut">
               <a:rPr lang="en-US" smtClean="0"/>
-              <a:t>8/20/2025</a:t>
+              <a:t>8/29/2025</a:t>
             </a:fld>
             <a:endParaRPr lang="en-US"/>
           </a:p>
@@ -3871,7 +3871,7 @@
           <a:p>
             <a:fld id="{44343DC6-30E4-4569-999A-C703F926F2AF}" type="datetimeFigureOut">
               <a:rPr lang="en-US" smtClean="0"/>
-              <a:t>8/20/2025</a:t>
+              <a:t>8/29/2025</a:t>
             </a:fld>
             <a:endParaRPr lang="en-US"/>
           </a:p>
@@ -17238,11 +17238,7 @@
           <a:p>
             <a:r>
               <a:rPr lang="ru-RU" sz="2200" dirty="0" smtClean="0"/>
-              <a:t>Также некоторые методы предсказания предоставляют результаты внутренней декомпозиции </a:t>
-            </a:r>
-            <a:r>
-              <a:rPr lang="ru-RU" sz="2200" dirty="0" smtClean="0"/>
-              <a:t>ВР </a:t>
+              <a:t>Также некоторые методы предсказания предоставляют результаты внутренней декомпозиции ВР </a:t>
             </a:r>
             <a:r>
               <a:rPr lang="en-US" sz="2200" dirty="0" smtClean="0"/>
@@ -20677,6 +20673,34 @@
           </a:p>
         </p:txBody>
       </p:sp>
+      <p:sp>
+        <p:nvSpPr>
+          <p:cNvPr id="3" name="Прямоугольник 2"/>
+          <p:cNvSpPr/>
+          <p:nvPr/>
+        </p:nvSpPr>
+        <p:spPr>
+          <a:xfrm>
+            <a:off x="296089" y="6564676"/>
+            <a:ext cx="6096000" cy="261610"/>
+          </a:xfrm>
+          <a:prstGeom prst="rect">
+            <a:avLst/>
+          </a:prstGeom>
+        </p:spPr>
+        <p:txBody>
+          <a:bodyPr>
+            <a:spAutoFit/>
+          </a:bodyPr>
+          <a:lstStyle/>
+          <a:p>
+            <a:r>
+              <a:rPr lang="ru-RU" sz="1100" dirty="0"/>
+              <a:t>https://readmedium.com/a-brief-history-of-time-series-models-38455c2cd78d</a:t>
+            </a:r>
+          </a:p>
+        </p:txBody>
+      </p:sp>
     </p:spTree>
     <p:extLst>
       <p:ext uri="{BB962C8B-B14F-4D97-AF65-F5344CB8AC3E}">
@@ -20757,7 +20781,7 @@
         </p:nvGraphicFramePr>
         <p:xfrm>
           <a:off x="300443" y="587484"/>
-          <a:ext cx="11521444" cy="5785729"/>
+          <a:ext cx="11521444" cy="5862434"/>
         </p:xfrm>
         <a:graphic>
           <a:graphicData uri="http://schemas.openxmlformats.org/drawingml/2006/table">

--- a/2025/LEC/02-2 Разложение и наивное предсказание.pptx
+++ b/2025/LEC/02-2 Разложение и наивное предсказание.pptx
@@ -254,7 +254,7 @@
           <a:p>
             <a:fld id="{C730246F-5962-E14A-AAF2-985CCFDAC345}" type="datetimeFigureOut">
               <a:rPr lang="ru-RU" smtClean="0"/>
-              <a:t>29.08.2025</a:t>
+              <a:t>04.09.2025</a:t>
             </a:fld>
             <a:endParaRPr lang="ru-RU"/>
           </a:p>
@@ -1202,7 +1202,7 @@
           <a:p>
             <a:fld id="{44343DC6-30E4-4569-999A-C703F926F2AF}" type="datetimeFigureOut">
               <a:rPr lang="en-US" smtClean="0"/>
-              <a:t>8/29/2025</a:t>
+              <a:t>9/4/25</a:t>
             </a:fld>
             <a:endParaRPr lang="en-US"/>
           </a:p>
@@ -1402,7 +1402,7 @@
           <a:p>
             <a:fld id="{44343DC6-30E4-4569-999A-C703F926F2AF}" type="datetimeFigureOut">
               <a:rPr lang="en-US" smtClean="0"/>
-              <a:t>8/29/2025</a:t>
+              <a:t>9/4/25</a:t>
             </a:fld>
             <a:endParaRPr lang="en-US"/>
           </a:p>
@@ -1612,7 +1612,7 @@
           <a:p>
             <a:fld id="{44343DC6-30E4-4569-999A-C703F926F2AF}" type="datetimeFigureOut">
               <a:rPr lang="en-US" smtClean="0"/>
-              <a:t>8/29/2025</a:t>
+              <a:t>9/4/25</a:t>
             </a:fld>
             <a:endParaRPr lang="en-US"/>
           </a:p>
@@ -1812,7 +1812,7 @@
           <a:p>
             <a:fld id="{44343DC6-30E4-4569-999A-C703F926F2AF}" type="datetimeFigureOut">
               <a:rPr lang="en-US" smtClean="0"/>
-              <a:t>8/29/2025</a:t>
+              <a:t>9/4/25</a:t>
             </a:fld>
             <a:endParaRPr lang="en-US"/>
           </a:p>
@@ -2088,7 +2088,7 @@
           <a:p>
             <a:fld id="{44343DC6-30E4-4569-999A-C703F926F2AF}" type="datetimeFigureOut">
               <a:rPr lang="en-US" smtClean="0"/>
-              <a:t>8/29/2025</a:t>
+              <a:t>9/4/25</a:t>
             </a:fld>
             <a:endParaRPr lang="en-US"/>
           </a:p>
@@ -2356,7 +2356,7 @@
           <a:p>
             <a:fld id="{44343DC6-30E4-4569-999A-C703F926F2AF}" type="datetimeFigureOut">
               <a:rPr lang="en-US" smtClean="0"/>
-              <a:t>8/29/2025</a:t>
+              <a:t>9/4/25</a:t>
             </a:fld>
             <a:endParaRPr lang="en-US"/>
           </a:p>
@@ -2771,7 +2771,7 @@
           <a:p>
             <a:fld id="{44343DC6-30E4-4569-999A-C703F926F2AF}" type="datetimeFigureOut">
               <a:rPr lang="en-US" smtClean="0"/>
-              <a:t>8/29/2025</a:t>
+              <a:t>9/4/25</a:t>
             </a:fld>
             <a:endParaRPr lang="en-US"/>
           </a:p>
@@ -2913,7 +2913,7 @@
           <a:p>
             <a:fld id="{44343DC6-30E4-4569-999A-C703F926F2AF}" type="datetimeFigureOut">
               <a:rPr lang="en-US" smtClean="0"/>
-              <a:t>8/29/2025</a:t>
+              <a:t>9/4/25</a:t>
             </a:fld>
             <a:endParaRPr lang="en-US"/>
           </a:p>
@@ -3026,7 +3026,7 @@
           <a:p>
             <a:fld id="{44343DC6-30E4-4569-999A-C703F926F2AF}" type="datetimeFigureOut">
               <a:rPr lang="en-US" smtClean="0"/>
-              <a:t>8/29/2025</a:t>
+              <a:t>9/4/25</a:t>
             </a:fld>
             <a:endParaRPr lang="en-US"/>
           </a:p>
@@ -3339,7 +3339,7 @@
           <a:p>
             <a:fld id="{44343DC6-30E4-4569-999A-C703F926F2AF}" type="datetimeFigureOut">
               <a:rPr lang="en-US" smtClean="0"/>
-              <a:t>8/29/2025</a:t>
+              <a:t>9/4/25</a:t>
             </a:fld>
             <a:endParaRPr lang="en-US"/>
           </a:p>
@@ -3628,7 +3628,7 @@
           <a:p>
             <a:fld id="{44343DC6-30E4-4569-999A-C703F926F2AF}" type="datetimeFigureOut">
               <a:rPr lang="en-US" smtClean="0"/>
-              <a:t>8/29/2025</a:t>
+              <a:t>9/4/25</a:t>
             </a:fld>
             <a:endParaRPr lang="en-US"/>
           </a:p>
@@ -3871,7 +3871,7 @@
           <a:p>
             <a:fld id="{44343DC6-30E4-4569-999A-C703F926F2AF}" type="datetimeFigureOut">
               <a:rPr lang="en-US" smtClean="0"/>
-              <a:t>8/29/2025</a:t>
+              <a:t>9/4/25</a:t>
             </a:fld>
             <a:endParaRPr lang="en-US"/>
           </a:p>
@@ -7451,12 +7451,6 @@
                         </a:rPr>
                         <a:t>Одна или </a:t>
                       </a:r>
-                      <a:r>
-                        <a:rPr lang="en-US" sz="1600" u="none" strike="noStrike" dirty="0">
-                          <a:effectLst/>
-                        </a:rPr>
-                        <a:t/>
-                      </a:r>
                       <a:br>
                         <a:rPr lang="en-US" sz="1600" u="none" strike="noStrike" dirty="0">
                           <a:effectLst/>
@@ -8549,12 +8543,6 @@
                           <a:effectLst/>
                         </a:rPr>
                         <a:t>+</a:t>
-                      </a:r>
-                      <a:r>
-                        <a:rPr lang="ru-RU" sz="1800" u="none" strike="noStrike" dirty="0">
-                          <a:effectLst/>
-                        </a:rPr>
-                        <a:t/>
                       </a:r>
                       <a:br>
                         <a:rPr lang="ru-RU" sz="1800" u="none" strike="noStrike" dirty="0">
@@ -10094,12 +10082,6 @@
                     <a:cs typeface="Times New Roman" panose="02020603050405020304" pitchFamily="18" charset="0"/>
                   </a:rPr>
                   <a:t> – это остаточная часть (шумы), </a:t>
-                </a:r>
-                <a:r>
-                  <a:rPr lang="en-US" altLang="ru-RU" sz="1800" dirty="0">
-                    <a:cs typeface="Times New Roman" panose="02020603050405020304" pitchFamily="18" charset="0"/>
-                  </a:rPr>
-                  <a:t/>
                 </a:r>
                 <a:br>
                   <a:rPr lang="en-US" altLang="ru-RU" sz="1800" dirty="0">
@@ -12249,12 +12231,6 @@
                   </a:rPr>
                   <a:t>,</a:t>
                 </a:r>
-                <a:r>
-                  <a:rPr lang="ru-RU" altLang="ru-RU" sz="2000" i="1" dirty="0">
-                    <a:cs typeface="Times New Roman" panose="02020603050405020304" pitchFamily="18" charset="0"/>
-                  </a:rPr>
-                  <a:t/>
-                </a:r>
                 <a:br>
                   <a:rPr lang="ru-RU" altLang="ru-RU" sz="2000" i="1" dirty="0">
                     <a:cs typeface="Times New Roman" panose="02020603050405020304" pitchFamily="18" charset="0"/>
@@ -14939,14 +14915,6 @@
   <p:clrMapOvr>
     <a:masterClrMapping/>
   </p:clrMapOvr>
-  <mc:AlternateContent xmlns:mc="http://schemas.openxmlformats.org/markup-compatibility/2006" xmlns:p14="http://schemas.microsoft.com/office/powerpoint/2010/main">
-    <mc:Choice Requires="p14">
-      <p:transition spd="slow" p14:dur="2000"/>
-    </mc:Choice>
-    <mc:Fallback xmlns="">
-      <p:transition spd="slow"/>
-    </mc:Fallback>
-  </mc:AlternateContent>
 </p:sld>
 </file>
 
@@ -17181,15 +17149,7 @@
             </a:r>
             <a:r>
               <a:rPr lang="ru-RU" sz="2200" dirty="0"/>
-              <a:t>, четкая </a:t>
-            </a:r>
-            <a:r>
-              <a:rPr lang="ru-RU" sz="2200" dirty="0" smtClean="0"/>
-              <a:t>структура </a:t>
-            </a:r>
-            <a:r>
-              <a:rPr lang="ru-RU" sz="2200" dirty="0"/>
-              <a:t>могут быть более точные методы, например</a:t>
+              <a:t>, четкая структура могут быть более точные методы, например</a:t>
             </a:r>
           </a:p>
           <a:p>
@@ -17208,15 +17168,7 @@
             </a:r>
             <a:r>
               <a:rPr lang="ru-RU" sz="2200" dirty="0"/>
-              <a:t>для </a:t>
-            </a:r>
-            <a:r>
-              <a:rPr lang="ru-RU" sz="2200" dirty="0" smtClean="0"/>
-              <a:t>бизнес-процессов </a:t>
-            </a:r>
-            <a:r>
-              <a:rPr lang="ru-RU" sz="2200" dirty="0"/>
-              <a:t>ВР</a:t>
+              <a:t>для бизнес-процессов ВР</a:t>
             </a:r>
           </a:p>
           <a:p>
@@ -17227,33 +17179,29 @@
             </a:r>
             <a:r>
               <a:rPr lang="ru-RU" sz="2200" dirty="0"/>
-              <a:t>для сезонной корректировки в экономических данных (глобальная экономика</a:t>
-            </a:r>
-            <a:r>
-              <a:rPr lang="ru-RU" sz="2200" dirty="0" smtClean="0"/>
-              <a:t>)</a:t>
-            </a:r>
-            <a:endParaRPr lang="en-US" sz="2200" dirty="0" smtClean="0"/>
-          </a:p>
-          <a:p>
-            <a:r>
-              <a:rPr lang="ru-RU" sz="2200" dirty="0" smtClean="0"/>
+              <a:t>для сезонной корректировки в экономических данных (глобальная экономика)</a:t>
+            </a:r>
+            <a:endParaRPr lang="en-US" sz="2200" dirty="0"/>
+          </a:p>
+          <a:p>
+            <a:r>
+              <a:rPr lang="ru-RU" sz="2200" dirty="0"/>
               <a:t>Также некоторые методы предсказания предоставляют результаты внутренней декомпозиции ВР </a:t>
             </a:r>
             <a:r>
-              <a:rPr lang="en-US" sz="2200" dirty="0" smtClean="0"/>
+              <a:rPr lang="en-US" sz="2200" dirty="0"/>
               <a:t>(Prophet, TBATS, </a:t>
             </a:r>
             <a:r>
-              <a:rPr lang="ru-RU" sz="2200" dirty="0" smtClean="0"/>
+              <a:rPr lang="ru-RU" sz="2200" dirty="0"/>
               <a:t>и </a:t>
             </a:r>
             <a:r>
-              <a:rPr lang="ru-RU" sz="2200" dirty="0" err="1" smtClean="0"/>
+              <a:rPr lang="ru-RU" sz="2200" dirty="0" err="1"/>
               <a:t>др</a:t>
             </a:r>
             <a:r>
-              <a:rPr lang="ru-RU" sz="2200" dirty="0" smtClean="0"/>
+              <a:rPr lang="ru-RU" sz="2200" dirty="0"/>
               <a:t>).</a:t>
             </a:r>
             <a:endParaRPr lang="en-US" sz="2200" dirty="0"/>
@@ -17399,10 +17347,9 @@
           <a:lstStyle/>
           <a:p>
             <a:r>
-              <a:rPr lang="ru-RU" dirty="0" smtClean="0"/>
+              <a:rPr lang="ru-RU" dirty="0"/>
               <a:t>Вопросы для самоконтроля</a:t>
             </a:r>
-            <a:endParaRPr lang="ru-RU" dirty="0"/>
           </a:p>
         </p:txBody>
       </p:sp>
@@ -17429,80 +17376,79 @@
           <a:lstStyle/>
           <a:p>
             <a:r>
-              <a:rPr lang="ru-RU" dirty="0" smtClean="0"/>
+              <a:rPr lang="ru-RU" dirty="0"/>
               <a:t>Назовите какие подходы к предсказанию ВР имеют место сегодня. Приведите примеры использования подходов. Какие подходы (и методы) стоит рассматривать как </a:t>
             </a:r>
             <a:r>
-              <a:rPr lang="ru-RU" dirty="0" err="1" smtClean="0"/>
+              <a:rPr lang="ru-RU" dirty="0" err="1"/>
               <a:t>бейзлайн</a:t>
             </a:r>
             <a:r>
-              <a:rPr lang="ru-RU" dirty="0" smtClean="0"/>
+              <a:rPr lang="ru-RU" dirty="0"/>
               <a:t>, какие проверять в последнюю очередь.</a:t>
             </a:r>
           </a:p>
           <a:p>
             <a:r>
-              <a:rPr lang="ru-RU" dirty="0" smtClean="0"/>
+              <a:rPr lang="ru-RU" dirty="0"/>
               <a:t>Объясните логику развития соревнований </a:t>
             </a:r>
             <a:r>
-              <a:rPr lang="ru-RU" dirty="0" err="1" smtClean="0"/>
+              <a:rPr lang="ru-RU" dirty="0" err="1"/>
               <a:t>Макридакиса</a:t>
             </a:r>
             <a:r>
-              <a:rPr lang="ru-RU" dirty="0" smtClean="0"/>
+              <a:rPr lang="ru-RU" dirty="0"/>
               <a:t>. Какие выводы можно сделать из этих соревнований. Приведите примеры практического использования и соответствующих задач, которые следует из результатов соревнований.</a:t>
             </a:r>
           </a:p>
           <a:p>
             <a:r>
-              <a:rPr lang="ru-RU" dirty="0" smtClean="0"/>
+              <a:rPr lang="ru-RU" dirty="0"/>
               <a:t> Назовите основные особенности подходов для разложения ВР. Объясните цель использования разложения. Расскажите как работает </a:t>
             </a:r>
             <a:r>
-              <a:rPr lang="en-US" dirty="0" smtClean="0"/>
+              <a:rPr lang="en-US" dirty="0"/>
               <a:t>STL </a:t>
             </a:r>
             <a:r>
-              <a:rPr lang="ru-RU" dirty="0" smtClean="0"/>
+              <a:rPr lang="ru-RU" dirty="0"/>
               <a:t>разложение. В каких случаях </a:t>
             </a:r>
             <a:r>
-              <a:rPr lang="en-US" dirty="0" smtClean="0"/>
+              <a:rPr lang="en-US" dirty="0"/>
               <a:t>STL </a:t>
             </a:r>
             <a:r>
-              <a:rPr lang="ru-RU" dirty="0" smtClean="0"/>
+              <a:rPr lang="ru-RU" dirty="0"/>
               <a:t>недостаточно?</a:t>
             </a:r>
           </a:p>
           <a:p>
             <a:r>
-              <a:rPr lang="ru-RU" dirty="0" smtClean="0"/>
+              <a:rPr lang="ru-RU" dirty="0"/>
               <a:t>Объясните цели использования и подходы к </a:t>
             </a:r>
             <a:r>
-              <a:rPr lang="en-US" dirty="0" err="1" smtClean="0"/>
+              <a:rPr lang="en-US" dirty="0" err="1"/>
               <a:t>detrend</a:t>
             </a:r>
             <a:r>
-              <a:rPr lang="en-US" dirty="0" smtClean="0"/>
+              <a:rPr lang="en-US" dirty="0"/>
               <a:t>, </a:t>
             </a:r>
             <a:r>
-              <a:rPr lang="en-US" dirty="0" err="1" smtClean="0"/>
+              <a:rPr lang="en-US" dirty="0" err="1"/>
               <a:t>deseasonlizer</a:t>
             </a:r>
             <a:r>
-              <a:rPr lang="en-US" dirty="0" smtClean="0"/>
+              <a:rPr lang="en-US" dirty="0"/>
               <a:t>, </a:t>
             </a:r>
             <a:r>
-              <a:rPr lang="ru-RU" dirty="0" smtClean="0"/>
+              <a:rPr lang="ru-RU" dirty="0"/>
               <a:t>в каких случаях этих подходов недостаточно? Какие шаги можно предложить для решения проблемы.</a:t>
             </a:r>
-            <a:endParaRPr lang="ru-RU" dirty="0"/>
           </a:p>
         </p:txBody>
       </p:sp>
@@ -17575,7 +17521,7 @@
         </p:nvSpPr>
         <p:spPr>
           <a:xfrm>
-            <a:off x="73799" y="4717062"/>
+            <a:off x="73799" y="4534499"/>
             <a:ext cx="11563350" cy="1924051"/>
           </a:xfrm>
         </p:spPr>
@@ -17695,6 +17641,62 @@
           </a:prstGeom>
         </p:spPr>
       </p:pic>
+      <p:sp>
+        <p:nvSpPr>
+          <p:cNvPr id="6" name="TextBox 5">
+            <a:extLst>
+              <a:ext uri="{FF2B5EF4-FFF2-40B4-BE49-F238E27FC236}">
+                <a16:creationId xmlns:a16="http://schemas.microsoft.com/office/drawing/2014/main" id="{2DB382E1-FD66-F7B2-B0CD-BCDC07F5F9B2}"/>
+              </a:ext>
+            </a:extLst>
+          </p:cNvPr>
+          <p:cNvSpPr txBox="1"/>
+          <p:nvPr/>
+        </p:nvSpPr>
+        <p:spPr>
+          <a:xfrm>
+            <a:off x="73799" y="6305976"/>
+            <a:ext cx="8893175" cy="276999"/>
+          </a:xfrm>
+          <a:prstGeom prst="rect">
+            <a:avLst/>
+          </a:prstGeom>
+          <a:noFill/>
+        </p:spPr>
+        <p:txBody>
+          <a:bodyPr wrap="square">
+            <a:spAutoFit/>
+          </a:bodyPr>
+          <a:lstStyle/>
+          <a:p>
+            <a:r>
+              <a:rPr lang="ru-RU" sz="1200" dirty="0">
+                <a:hlinkClick r:id="rId3"/>
+              </a:rPr>
+              <a:t>https://t.me/youknowds/10517</a:t>
+            </a:r>
+            <a:r>
+              <a:rPr lang="ru-RU" sz="1200" dirty="0"/>
+              <a:t> -</a:t>
+            </a:r>
+            <a:r>
+              <a:rPr lang="en-US" sz="1200" dirty="0"/>
+              <a:t>&gt; </a:t>
+            </a:r>
+            <a:r>
+              <a:rPr lang="en-US" sz="1200" dirty="0">
+                <a:hlinkClick r:id="rId4"/>
+              </a:rPr>
+              <a:t>https://cs.hse.ru/mirror/pubs/share/1017921910.pdf</a:t>
+            </a:r>
+            <a:r>
+              <a:rPr lang="en-US" sz="1200" dirty="0"/>
+              <a:t> </a:t>
+            </a:r>
+            <a:endParaRPr lang="ru-RU" sz="1200" dirty="0"/>
+          </a:p>
+        </p:txBody>
+      </p:sp>
     </p:spTree>
     <p:extLst>
       <p:ext uri="{BB962C8B-B14F-4D97-AF65-F5344CB8AC3E}">
@@ -18295,7 +18297,7 @@
         </p:nvGraphicFramePr>
         <p:xfrm>
           <a:off x="228598" y="1401333"/>
-          <a:ext cx="11671666" cy="4576737"/>
+          <a:ext cx="11671666" cy="4494378"/>
         </p:xfrm>
         <a:graphic>
           <a:graphicData uri="http://schemas.openxmlformats.org/drawingml/2006/table">
